--- a/Projeto/aulas-3-a-7.pptx
+++ b/Projeto/aulas-3-a-7.pptx
@@ -4,6 +4,9 @@
   <p:sldMasterIdLst>
     <p:sldMasterId id="2147483648" r:id="rId1"/>
   </p:sldMasterIdLst>
+  <p:notesMasterIdLst>
+    <p:notesMasterId r:id="rId19"/>
+  </p:notesMasterIdLst>
   <p:sldIdLst>
     <p:sldId id="256" r:id="rId2"/>
     <p:sldId id="257" r:id="rId3"/>
@@ -23,9 +26,6 @@
     <p:sldId id="271" r:id="rId17"/>
     <p:sldId id="272" r:id="rId18"/>
   </p:sldIdLst>
-  <p:notesMasterIdLst>
-    <p:notesMasterId r:id="rId19"/>
-  </p:notesMasterIdLst>
   <p:sldSz cx="12192000" cy="6858000"/>
   <p:notesSz cx="6858000" cy="12192000"/>
   <p:defaultTextStyle>
@@ -120,6 +120,11 @@
       </a:defRPr>
     </a:lvl9pPr>
   </p:defaultTextStyle>
+  <p:extLst>
+    <p:ext uri="{EFAFB233-063F-42B5-8137-9DF3F51BA10A}">
+      <p15:sldGuideLst xmlns:p15="http://schemas.microsoft.com/office/powerpoint/2012/main"/>
+    </p:ext>
+  </p:extLst>
 </p:presentation>
 </file>
 
@@ -145,234 +150,10 @@
           <a:chExt cx="0" cy="0"/>
         </a:xfrm>
       </p:grpSpPr>
-      <p:sp>
-        <p:nvSpPr>
-          <p:cNvPr id="2" name="Header Placeholder 1"/>
-          <p:cNvSpPr>
-            <a:spLocks noGrp="1"/>
-          </p:cNvSpPr>
-          <p:nvPr>
-            <p:ph type="hdr" sz="quarter"/>
-          </p:nvPr>
-        </p:nvSpPr>
-        <p:spPr>
-          <a:xfrm>
-            <a:off x="0" y="0"/>
-            <a:ext cx="2971800" cy="458788"/>
-          </a:xfrm>
-          <a:prstGeom prst="rect">
-            <a:avLst/>
-          </a:prstGeom>
-        </p:spPr>
-        <p:txBody>
-          <a:bodyPr vert="horz" lIns="91440" tIns="45720" rIns="91440" bIns="45720" rtlCol="0"/>
-          <a:lstStyle>
-            <a:lvl1pPr algn="l">
-              <a:defRPr sz="1200"/>
-            </a:lvl1pPr>
-          </a:lstStyle>
-          <a:p>
-            <a:endParaRPr lang="en-US"/>
-          </a:p>
-        </p:txBody>
-      </p:sp>
-      <p:sp>
-        <p:nvSpPr>
-          <p:cNvPr id="3" name="Date Placeholder 2"/>
-          <p:cNvSpPr>
-            <a:spLocks noGrp="1"/>
-          </p:cNvSpPr>
-          <p:nvPr>
-            <p:ph type="dt" idx="1"/>
-          </p:nvPr>
-        </p:nvSpPr>
-        <p:spPr>
-          <a:xfrm>
-            <a:off x="3884613" y="0"/>
-            <a:ext cx="2971800" cy="458788"/>
-          </a:xfrm>
-          <a:prstGeom prst="rect">
-            <a:avLst/>
-          </a:prstGeom>
-        </p:spPr>
-        <p:txBody>
-          <a:bodyPr vert="horz" lIns="91440" tIns="45720" rIns="91440" bIns="45720" rtlCol="0"/>
-          <a:lstStyle>
-            <a:lvl1pPr algn="r">
-              <a:defRPr sz="1200"/>
-            </a:lvl1pPr>
-          </a:lstStyle>
-          <a:p>
-            <a:fld id="{5282F153-3F37-0F45-9E97-73ACFA13230C}" type="datetimeFigureOut">
-              <a:rPr lang="en-US"/>
-              <a:t>7/23/19</a:t>
-            </a:fld>
-            <a:endParaRPr lang="en-US"/>
-          </a:p>
-        </p:txBody>
-      </p:sp>
-      <p:sp>
-        <p:nvSpPr>
-          <p:cNvPr id="4" name="Slide Image Placeholder 3"/>
-          <p:cNvSpPr>
-            <a:spLocks noGrp="1" noRot="1" noChangeAspect="1"/>
-          </p:cNvSpPr>
-          <p:nvPr>
-            <p:ph type="sldImg" idx="2"/>
-          </p:nvPr>
-        </p:nvSpPr>
-        <p:spPr>
-          <a:xfrm>
-            <a:off x="685800" y="1143000"/>
-            <a:ext cx="5486400" cy="3086100"/>
-          </a:xfrm>
-          <a:prstGeom prst="rect">
-            <a:avLst/>
-          </a:prstGeom>
-          <a:noFill/>
-          <a:ln w="12700">
-            <a:solidFill>
-              <a:prstClr val="black"/>
-            </a:solidFill>
-          </a:ln>
-        </p:spPr>
-        <p:txBody>
-          <a:bodyPr vert="horz" lIns="91440" tIns="45720" rIns="91440" bIns="45720" rtlCol="0" anchor="ctr"/>
-          <a:lstStyle/>
-          <a:p>
-            <a:endParaRPr lang="en-US"/>
-          </a:p>
-        </p:txBody>
-      </p:sp>
-      <p:sp>
-        <p:nvSpPr>
-          <p:cNvPr id="5" name="Notes Placeholder 4"/>
-          <p:cNvSpPr>
-            <a:spLocks noGrp="1"/>
-          </p:cNvSpPr>
-          <p:nvPr>
-            <p:ph type="body" sz="quarter" idx="3"/>
-          </p:nvPr>
-        </p:nvSpPr>
-        <p:spPr>
-          <a:xfrm>
-            <a:off x="685800" y="4400550"/>
-            <a:ext cx="5486400" cy="3600450"/>
-          </a:xfrm>
-          <a:prstGeom prst="rect">
-            <a:avLst/>
-          </a:prstGeom>
-        </p:spPr>
-        <p:txBody>
-          <a:bodyPr vert="horz" lIns="91440" tIns="45720" rIns="91440" bIns="45720" rtlCol="0"/>
-          <a:lstStyle/>
-          <a:p>
-            <a:pPr lvl="0"/>
-            <a:r>
-              <a:rPr lang="en-US"/>
-              <a:t>Click to edit Master text styles</a:t>
-            </a:r>
-          </a:p>
-          <a:p>
-            <a:pPr lvl="1"/>
-            <a:r>
-              <a:rPr lang="en-US"/>
-              <a:t>Second level</a:t>
-            </a:r>
-          </a:p>
-          <a:p>
-            <a:pPr lvl="2"/>
-            <a:r>
-              <a:rPr lang="en-US"/>
-              <a:t>Third level</a:t>
-            </a:r>
-          </a:p>
-          <a:p>
-            <a:pPr lvl="3"/>
-            <a:r>
-              <a:rPr lang="en-US"/>
-              <a:t>Fourth level</a:t>
-            </a:r>
-          </a:p>
-          <a:p>
-            <a:pPr lvl="4"/>
-            <a:r>
-              <a:rPr lang="en-US"/>
-              <a:t>Fifth level</a:t>
-            </a:r>
-          </a:p>
-        </p:txBody>
-      </p:sp>
-      <p:sp>
-        <p:nvSpPr>
-          <p:cNvPr id="6" name="Footer Placeholder 5"/>
-          <p:cNvSpPr>
-            <a:spLocks noGrp="1"/>
-          </p:cNvSpPr>
-          <p:nvPr>
-            <p:ph type="ftr" sz="quarter" idx="4"/>
-          </p:nvPr>
-        </p:nvSpPr>
-        <p:spPr>
-          <a:xfrm>
-            <a:off x="0" y="8685213"/>
-            <a:ext cx="2971800" cy="458787"/>
-          </a:xfrm>
-          <a:prstGeom prst="rect">
-            <a:avLst/>
-          </a:prstGeom>
-        </p:spPr>
-        <p:txBody>
-          <a:bodyPr vert="horz" lIns="91440" tIns="45720" rIns="91440" bIns="45720" rtlCol="0" anchor="b"/>
-          <a:lstStyle>
-            <a:lvl1pPr algn="l">
-              <a:defRPr sz="1200"/>
-            </a:lvl1pPr>
-          </a:lstStyle>
-          <a:p>
-            <a:endParaRPr lang="en-US"/>
-          </a:p>
-        </p:txBody>
-      </p:sp>
-      <p:sp>
-        <p:nvSpPr>
-          <p:cNvPr id="7" name="Slide Number Placeholder 6"/>
-          <p:cNvSpPr>
-            <a:spLocks noGrp="1"/>
-          </p:cNvSpPr>
-          <p:nvPr>
-            <p:ph type="sldNum" sz="quarter" idx="5"/>
-          </p:nvPr>
-        </p:nvSpPr>
-        <p:spPr>
-          <a:xfrm>
-            <a:off x="3884613" y="8685213"/>
-            <a:ext cx="2971800" cy="458787"/>
-          </a:xfrm>
-          <a:prstGeom prst="rect">
-            <a:avLst/>
-          </a:prstGeom>
-        </p:spPr>
-        <p:txBody>
-          <a:bodyPr vert="horz" lIns="91440" tIns="45720" rIns="91440" bIns="45720" rtlCol="0" anchor="b"/>
-          <a:lstStyle>
-            <a:lvl1pPr algn="r">
-              <a:defRPr sz="1200"/>
-            </a:lvl1pPr>
-          </a:lstStyle>
-          <a:p>
-            <a:fld id="{CE5E9CC1-C706-0F49-92D6-E571CC5EEA8F}" type="slidenum">
-              <a:rPr lang="en-US"/>
-              <a:t>‹#›</a:t>
-            </a:fld>
-            <a:endParaRPr lang="en-US"/>
-          </a:p>
-        </p:txBody>
-      </p:sp>
     </p:spTree>
     <p:extLst>
       <p:ext uri="{BB962C8B-B14F-4D97-AF65-F5344CB8AC3E}">
-        <p14:creationId xmlns:p14="http://schemas.microsoft.com/office/powerpoint/2010/main" val="1024086991"/>
+        <p14:creationId xmlns:p14="http://schemas.microsoft.com/office/powerpoint/2010/main" val="1911121892"/>
       </p:ext>
     </p:extLst>
   </p:cSld>
@@ -520,7 +301,6 @@
               <a:rPr lang="en-US" dirty="0"/>
               <a:t>Abertura. Retome onde paramos: o herói já existe (Aula 1-2). Nas próximas 5 aulas ele ganha ações, decisões, um inimigo e a primeira batalha jogável.</a:t>
             </a:r>
-            <a:endParaRPr lang="en-US" dirty="0"/>
           </a:p>
         </p:txBody>
       </p:sp>
@@ -608,7 +388,6 @@
               <a:rPr lang="en-US" dirty="0"/>
               <a:t>Reforce a ordem dos if/else if. Bônus conecta direto ao exemplo de mercado do slide anterior.</a:t>
             </a:r>
-            <a:endParaRPr lang="en-US" dirty="0"/>
           </a:p>
         </p:txBody>
       </p:sp>
@@ -696,7 +475,6 @@
               <a:rPr lang="en-US" dirty="0"/>
               <a:t>O "momento aha": a função mostrarFicha, escrita para o herói, funciona no inimigo de graça porque têm o mesmo formato. Padronizar estrutura economiza trabalho.</a:t>
             </a:r>
-            <a:endParaRPr lang="en-US" dirty="0"/>
           </a:p>
         </p:txBody>
       </p:sp>
@@ -784,7 +562,6 @@
               <a:rPr lang="en-US" dirty="0"/>
               <a:t>Conceito de "efeito colateral": a função não devolve nada, mas modifica o objeto que recebeu. dano mínimo 1 evita cura acidental e loop infinito depois.</a:t>
             </a:r>
-            <a:endParaRPr lang="en-US" dirty="0"/>
           </a:p>
         </p:txBody>
       </p:sp>
@@ -872,7 +649,6 @@
               <a:rPr lang="en-US" dirty="0"/>
               <a:t>Aqui eles sentem a repetição de chamar atacar na mão — o que motiva o laço do próximo bloco.</a:t>
             </a:r>
-            <a:endParaRPr lang="en-US" dirty="0"/>
           </a:p>
         </p:txBody>
       </p:sp>
@@ -960,7 +736,6 @@
               <a:rPr lang="en-US" dirty="0"/>
               <a:t>Conexão com Aula 6: o dano mínimo de 1 garante que a vida sempre cai, então o laço termina. Regra do jogo + segurança do código juntas.</a:t>
             </a:r>
-            <a:endParaRPr lang="en-US" dirty="0"/>
           </a:p>
         </p:txBody>
       </p:sp>
@@ -1048,7 +823,6 @@
               <a:rPr lang="en-US" dirty="0"/>
               <a:t>Este é o clímax do bloco: a primeira batalha automática. Celebre — é a primeira coisa jogável do curso.</a:t>
             </a:r>
-            <a:endParaRPr lang="en-US" dirty="0"/>
           </a:p>
         </p:txBody>
       </p:sp>
@@ -1136,7 +910,6 @@
               <a:rPr lang="en-US" dirty="0"/>
               <a:t>Feche a lógica: objeto + função + decisão + laço = um sistema que funciona. É a arquitetura de qualquer software.</a:t>
             </a:r>
-            <a:endParaRPr lang="en-US" dirty="0"/>
           </a:p>
         </p:txBody>
       </p:sp>
@@ -1224,7 +997,6 @@
               <a:rPr lang="en-US" dirty="0"/>
               <a:t>Encerre com o mapa das conquistas e a motivação. O jogo jogável é a prova concreta do aprendizado.</a:t>
             </a:r>
-            <a:endParaRPr lang="en-US" dirty="0"/>
           </a:p>
         </p:txBody>
       </p:sp>
@@ -1312,7 +1084,6 @@
               <a:rPr lang="en-US" dirty="0"/>
               <a:t>Mostre o destino antes de começar. Marque "onde estamos" a cada aula. Aula 7 é um marco: primeira coisa jogável.</a:t>
             </a:r>
-            <a:endParaRPr lang="en-US" dirty="0"/>
           </a:p>
         </p:txBody>
       </p:sp>
@@ -1400,7 +1171,6 @@
               <a:rPr lang="en-US" dirty="0"/>
               <a:t>O jogo é o pretexto. Reforce: cada conceito destes aparece em qualquer software que eles forem construir.</a:t>
             </a:r>
-            <a:endParaRPr lang="en-US" dirty="0"/>
           </a:p>
         </p:txBody>
       </p:sp>
@@ -1488,7 +1258,6 @@
               <a:rPr lang="en-US" dirty="0"/>
               <a:t>Metáfora da máquina/receita. Parâmetro = o ingrediente; return = o prato pronto. Sem return, a função não devolve nada (undefined).</a:t>
             </a:r>
-            <a:endParaRPr lang="en-US" dirty="0"/>
           </a:p>
         </p:txBody>
       </p:sp>
@@ -1576,7 +1345,6 @@
               <a:rPr lang="en-US" dirty="0"/>
               <a:t>Ponto central: reutilização (DRY). Uma função de formatação de moeda pode ser usada em 50 telas. É assim no trabalho real.</a:t>
             </a:r>
-            <a:endParaRPr lang="en-US" dirty="0"/>
           </a:p>
         </p:txBody>
       </p:sp>
@@ -1664,7 +1432,6 @@
               <a:rPr lang="en-US" dirty="0"/>
               <a:t>Responde diretamente ao pedido de explicar função x método x classe. Deixe claro: hoje é função; método e classe vêm depois (Aula 10), mas é para lá que caminha.</a:t>
             </a:r>
-            <a:endParaRPr lang="en-US" dirty="0"/>
           </a:p>
         </p:txBody>
       </p:sp>
@@ -1752,7 +1519,6 @@
               <a:rPr lang="en-US" dirty="0"/>
               <a:t>Circule pela sala. Erros comuns: chamar a função sem os parênteses; esquecer o return.</a:t>
             </a:r>
-            <a:endParaRPr lang="en-US" dirty="0"/>
           </a:p>
         </p:txBody>
       </p:sp>
@@ -1840,7 +1606,6 @@
               <a:rPr lang="en-US" dirty="0"/>
               <a:t>O erro clássico: = vs ===. Mostre que if (vida = 0) atribui e quebra tudo. Teste do mais grave (morte) para o mais leve.</a:t>
             </a:r>
-            <a:endParaRPr lang="en-US" dirty="0"/>
           </a:p>
         </p:txBody>
       </p:sp>
@@ -1928,7 +1693,6 @@
               <a:rPr lang="en-US" dirty="0"/>
               <a:t>Peça exemplos à turma: onde eles já viram "regras" em apps que usam? (frete grátis acima de X, etc.)</a:t>
             </a:r>
-            <a:endParaRPr lang="en-US" dirty="0"/>
           </a:p>
         </p:txBody>
       </p:sp>
@@ -2001,6 +1765,11 @@
 <file path=ppt/slideMasters/slideMaster1.xml><?xml version="1.0" encoding="utf-8"?>
 <p:sldMaster xmlns:a="http://schemas.openxmlformats.org/drawingml/2006/main" xmlns:r="http://schemas.openxmlformats.org/officeDocument/2006/relationships" xmlns:p="http://schemas.openxmlformats.org/presentationml/2006/main">
   <p:cSld>
+    <p:bg>
+      <p:bgRef idx="1001">
+        <a:schemeClr val="bg1"/>
+      </p:bgRef>
+    </p:bg>
     <p:spTree>
       <p:nvGrpSpPr>
         <p:cNvPr id="1" name=""/>
@@ -2283,6 +2052,7 @@
         <a:solidFill>
           <a:srgbClr val="1E1526"/>
         </a:solidFill>
+        <a:effectLst/>
       </p:bgPr>
     </p:bg>
     <p:spTree>
@@ -2360,11 +2130,11 @@
           <a:bodyPr wrap="square" lIns="0" tIns="0" rIns="0" bIns="0" rtlCol="0" anchor="ctr"/>
           <a:lstStyle/>
           <a:p>
-            <a:pPr indent="0" marL="0">
-              <a:buNone/>
-            </a:pPr>
-            <a:r>
-              <a:rPr lang="en-US" sz="1400" b="1" spc="200" kern="0" dirty="0">
+            <a:pPr marL="0" indent="0">
+              <a:buNone/>
+            </a:pPr>
+            <a:r>
+              <a:rPr lang="en-US" sz="1400" b="1" kern="0" spc="200" dirty="0">
                 <a:solidFill>
                   <a:srgbClr val="9B72D0"/>
                 </a:solidFill>
@@ -2399,7 +2169,7 @@
           <a:bodyPr wrap="square" lIns="0" tIns="0" rIns="0" bIns="0" rtlCol="0" anchor="ctr"/>
           <a:lstStyle/>
           <a:p>
-            <a:pPr indent="0" marL="0">
+            <a:pPr marL="0" indent="0">
               <a:lnSpc>
                 <a:spcPct val="100000"/>
               </a:lnSpc>
@@ -2419,7 +2189,7 @@
             <a:endParaRPr lang="en-US" sz="5200" dirty="0"/>
           </a:p>
           <a:p>
-            <a:pPr indent="0" marL="0">
+            <a:pPr marL="0" indent="0">
               <a:lnSpc>
                 <a:spcPct val="100000"/>
               </a:lnSpc>
@@ -2461,7 +2231,7 @@
           <a:bodyPr wrap="square" lIns="0" tIns="0" rIns="0" bIns="0" rtlCol="0" anchor="ctr"/>
           <a:lstStyle/>
           <a:p>
-            <a:pPr indent="0" marL="0">
+            <a:pPr marL="0" indent="0">
               <a:buNone/>
             </a:pPr>
             <a:r>
@@ -2587,7 +2357,7 @@
           <a:bodyPr wrap="square" lIns="0" tIns="0" rIns="0" bIns="0" rtlCol="0" anchor="t"/>
           <a:lstStyle/>
           <a:p>
-            <a:pPr algn="l" indent="0" marL="0">
+            <a:pPr marL="0" indent="0" algn="l">
               <a:lnSpc>
                 <a:spcPct val="112000"/>
               </a:lnSpc>
@@ -2607,7 +2377,7 @@
             <a:endParaRPr lang="en-US" sz="1400" dirty="0"/>
           </a:p>
           <a:p>
-            <a:pPr algn="l" indent="0" marL="0">
+            <a:pPr marL="0" indent="0" algn="l">
               <a:lnSpc>
                 <a:spcPct val="112000"/>
               </a:lnSpc>
@@ -2644,6 +2414,7 @@
         <a:solidFill>
           <a:srgbClr val="271C33"/>
         </a:solidFill>
+        <a:effectLst/>
       </p:bgPr>
     </p:bg>
     <p:spTree>
@@ -2721,11 +2492,11 @@
           <a:bodyPr wrap="square" lIns="0" tIns="0" rIns="0" bIns="0" rtlCol="0" anchor="ctr"/>
           <a:lstStyle/>
           <a:p>
-            <a:pPr indent="0" marL="0">
-              <a:buNone/>
-            </a:pPr>
-            <a:r>
-              <a:rPr lang="en-US" sz="1500" b="1" spc="300" kern="0" dirty="0">
+            <a:pPr marL="0" indent="0">
+              <a:buNone/>
+            </a:pPr>
+            <a:r>
+              <a:rPr lang="en-US" sz="1500" b="1" kern="0" spc="300" dirty="0">
                 <a:solidFill>
                   <a:srgbClr val="9B72D0"/>
                 </a:solidFill>
@@ -2760,7 +2531,7 @@
           <a:bodyPr wrap="square" lIns="0" tIns="0" rIns="0" bIns="0" rtlCol="0" anchor="ctr"/>
           <a:lstStyle/>
           <a:p>
-            <a:pPr indent="0" marL="0">
+            <a:pPr marL="0" indent="0">
               <a:buNone/>
             </a:pPr>
             <a:r>
@@ -2826,7 +2597,7 @@
           <a:bodyPr wrap="square" lIns="0" tIns="0" rIns="0" bIns="0" rtlCol="0" anchor="ctr"/>
           <a:lstStyle/>
           <a:p>
-            <a:pPr indent="0" marL="0">
+            <a:pPr marL="0" indent="0">
               <a:lnSpc>
                 <a:spcPct val="115000"/>
               </a:lnSpc>
@@ -2846,7 +2617,7 @@
             <a:endParaRPr lang="en-US" sz="1900" dirty="0"/>
           </a:p>
           <a:p>
-            <a:pPr indent="0" marL="0">
+            <a:pPr marL="0" indent="0">
               <a:lnSpc>
                 <a:spcPct val="115000"/>
               </a:lnSpc>
@@ -2855,7 +2626,7 @@
             <a:endParaRPr lang="en-US" sz="1900" dirty="0"/>
           </a:p>
           <a:p>
-            <a:pPr indent="0" marL="0">
+            <a:pPr marL="0" indent="0">
               <a:lnSpc>
                 <a:spcPct val="115000"/>
               </a:lnSpc>
@@ -2878,67 +2649,6 @@
       </p:sp>
       <p:sp>
         <p:nvSpPr>
-          <p:cNvPr id="8" name="Shape 6"/>
-          <p:cNvSpPr/>
-          <p:nvPr/>
-        </p:nvSpPr>
-        <p:spPr>
-          <a:xfrm>
-            <a:off x="731520" y="5212080"/>
-            <a:ext cx="2743200" cy="640080"/>
-          </a:xfrm>
-          <a:prstGeom prst="roundRect">
-            <a:avLst>
-              <a:gd name="adj" fmla="val 12857"/>
-            </a:avLst>
-          </a:prstGeom>
-          <a:solidFill>
-            <a:srgbClr val="6D4AA0"/>
-          </a:solidFill>
-          <a:ln/>
-        </p:spPr>
-      </p:sp>
-      <p:sp>
-        <p:nvSpPr>
-          <p:cNvPr id="9" name="Text 7"/>
-          <p:cNvSpPr/>
-          <p:nvPr/>
-        </p:nvSpPr>
-        <p:spPr>
-          <a:xfrm>
-            <a:off x="731520" y="5212080"/>
-            <a:ext cx="2743200" cy="640080"/>
-          </a:xfrm>
-          <a:prstGeom prst="rect">
-            <a:avLst/>
-          </a:prstGeom>
-          <a:noFill/>
-          <a:ln/>
-        </p:spPr>
-        <p:txBody>
-          <a:bodyPr wrap="square" lIns="0" tIns="0" rIns="0" bIns="0" rtlCol="0" anchor="ctr"/>
-          <a:lstStyle/>
-          <a:p>
-            <a:pPr algn="ctr" indent="0" marL="0">
-              <a:buNone/>
-            </a:pPr>
-            <a:r>
-              <a:rPr lang="en-US" sz="1600" b="1" dirty="0">
-                <a:solidFill>
-                  <a:srgbClr val="FFFFFF"/>
-                </a:solidFill>
-                <a:latin typeface="Calibri" pitchFamily="34" charset="0"/>
-                <a:ea typeface="Calibri" pitchFamily="34" charset="-122"/>
-                <a:cs typeface="Calibri" pitchFamily="34" charset="-120"/>
-              </a:rPr>
-              <a:t>≈ 8 min · em duplas</a:t>
-            </a:r>
-            <a:endParaRPr lang="en-US" sz="1600" dirty="0"/>
-          </a:p>
-        </p:txBody>
-      </p:sp>
-      <p:sp>
-        <p:nvSpPr>
           <p:cNvPr id="10" name="Text 8"/>
           <p:cNvSpPr/>
           <p:nvPr/>
@@ -2958,7 +2668,7 @@
           <a:bodyPr wrap="square" lIns="0" tIns="0" rIns="0" bIns="0" rtlCol="0" anchor="ctr"/>
           <a:lstStyle/>
           <a:p>
-            <a:pPr algn="r" indent="0" marL="0">
+            <a:pPr marL="0" indent="0" algn="r">
               <a:buNone/>
             </a:pPr>
             <a:r>
@@ -2992,6 +2702,7 @@
         <a:solidFill>
           <a:srgbClr val="1E1526"/>
         </a:solidFill>
+        <a:effectLst/>
       </p:bgPr>
     </p:bg>
     <p:spTree>
@@ -3029,11 +2740,11 @@
           <a:bodyPr wrap="square" lIns="0" tIns="0" rIns="0" bIns="0" rtlCol="0" anchor="ctr"/>
           <a:lstStyle/>
           <a:p>
-            <a:pPr indent="0" marL="0">
-              <a:buNone/>
-            </a:pPr>
-            <a:r>
-              <a:rPr lang="en-US" sz="1200" b="1" spc="200" kern="0" dirty="0">
+            <a:pPr marL="0" indent="0">
+              <a:buNone/>
+            </a:pPr>
+            <a:r>
+              <a:rPr lang="en-US" sz="1200" b="1" kern="0" spc="200" dirty="0">
                 <a:solidFill>
                   <a:srgbClr val="9B72D0"/>
                 </a:solidFill>
@@ -3068,7 +2779,7 @@
           <a:bodyPr wrap="square" lIns="0" tIns="0" rIns="0" bIns="0" rtlCol="0" anchor="ctr"/>
           <a:lstStyle/>
           <a:p>
-            <a:pPr algn="l" indent="0" marL="0">
+            <a:pPr marL="0" indent="0" algn="l">
               <a:buNone/>
             </a:pPr>
             <a:r>
@@ -3129,11 +2840,11 @@
           <a:bodyPr wrap="square" lIns="0" tIns="0" rIns="0" bIns="0" rtlCol="0" anchor="ctr"/>
           <a:lstStyle/>
           <a:p>
-            <a:pPr algn="ctr" indent="0" marL="0">
-              <a:buNone/>
-            </a:pPr>
-            <a:r>
-              <a:rPr lang="en-US" sz="1300" b="1" spc="100" kern="0" dirty="0">
+            <a:pPr marL="0" indent="0" algn="ctr">
+              <a:buNone/>
+            </a:pPr>
+            <a:r>
+              <a:rPr lang="en-US" sz="1300" b="1" kern="0" spc="100" dirty="0">
                 <a:solidFill>
                   <a:srgbClr val="FFFFFF"/>
                 </a:solidFill>
@@ -3168,7 +2879,7 @@
           <a:bodyPr wrap="square" lIns="0" tIns="0" rIns="0" bIns="0" rtlCol="0" anchor="ctr"/>
           <a:lstStyle/>
           <a:p>
-            <a:pPr algn="r" indent="0" marL="0">
+            <a:pPr marL="0" indent="0" algn="r">
               <a:buNone/>
             </a:pPr>
             <a:r>
@@ -3207,7 +2918,7 @@
           <a:bodyPr wrap="square" lIns="0" tIns="0" rIns="0" bIns="0" rtlCol="0" anchor="t"/>
           <a:lstStyle/>
           <a:p>
-            <a:pPr algn="l" marL="203200" indent="-203200">
+            <a:pPr marL="203200" indent="-203200" algn="l">
               <a:spcAft>
                 <a:spcPts val="1100"/>
               </a:spcAft>
@@ -3228,7 +2939,7 @@
             <a:endParaRPr lang="en-US" sz="1600" dirty="0"/>
           </a:p>
           <a:p>
-            <a:pPr algn="l" marL="203200" indent="-203200">
+            <a:pPr marL="203200" indent="-203200" algn="l">
               <a:spcAft>
                 <a:spcPts val="1100"/>
               </a:spcAft>
@@ -3249,7 +2960,7 @@
             <a:endParaRPr lang="en-US" sz="1600" dirty="0"/>
           </a:p>
           <a:p>
-            <a:pPr algn="l" marL="203200" indent="-203200">
+            <a:pPr marL="203200" indent="-203200" algn="l">
               <a:spcAft>
                 <a:spcPts val="1100"/>
               </a:spcAft>
@@ -3270,7 +2981,7 @@
             <a:endParaRPr lang="en-US" sz="1600" dirty="0"/>
           </a:p>
           <a:p>
-            <a:pPr algn="l" marL="203200" indent="-203200">
+            <a:pPr marL="203200" indent="-203200" algn="l">
               <a:spcAft>
                 <a:spcPts val="1100"/>
               </a:spcAft>
@@ -3340,7 +3051,7 @@
           <a:bodyPr wrap="square" lIns="0" tIns="0" rIns="0" bIns="0" rtlCol="0" anchor="ctr"/>
           <a:lstStyle/>
           <a:p>
-            <a:pPr algn="l" indent="0" marL="0">
+            <a:pPr marL="0" indent="0" algn="l">
               <a:buNone/>
             </a:pPr>
             <a:r>
@@ -3466,7 +3177,7 @@
           <a:bodyPr wrap="square" lIns="0" tIns="0" rIns="0" bIns="0" rtlCol="0" anchor="t"/>
           <a:lstStyle/>
           <a:p>
-            <a:pPr algn="l" indent="0" marL="0">
+            <a:pPr marL="0" indent="0" algn="l">
               <a:lnSpc>
                 <a:spcPct val="112000"/>
               </a:lnSpc>
@@ -3486,7 +3197,7 @@
             <a:endParaRPr lang="en-US" sz="1400" dirty="0"/>
           </a:p>
           <a:p>
-            <a:pPr algn="l" indent="0" marL="0">
+            <a:pPr marL="0" indent="0" algn="l">
               <a:lnSpc>
                 <a:spcPct val="112000"/>
               </a:lnSpc>
@@ -3506,7 +3217,7 @@
             <a:endParaRPr lang="en-US" sz="1400" dirty="0"/>
           </a:p>
           <a:p>
-            <a:pPr algn="l" indent="0" marL="0">
+            <a:pPr marL="0" indent="0" algn="l">
               <a:lnSpc>
                 <a:spcPct val="112000"/>
               </a:lnSpc>
@@ -3526,7 +3237,7 @@
             <a:endParaRPr lang="en-US" sz="1400" dirty="0"/>
           </a:p>
           <a:p>
-            <a:pPr algn="l" indent="0" marL="0">
+            <a:pPr marL="0" indent="0" algn="l">
               <a:lnSpc>
                 <a:spcPct val="112000"/>
               </a:lnSpc>
@@ -3546,7 +3257,7 @@
             <a:endParaRPr lang="en-US" sz="1400" dirty="0"/>
           </a:p>
           <a:p>
-            <a:pPr algn="l" indent="0" marL="0">
+            <a:pPr marL="0" indent="0" algn="l">
               <a:lnSpc>
                 <a:spcPct val="112000"/>
               </a:lnSpc>
@@ -3566,7 +3277,7 @@
             <a:endParaRPr lang="en-US" sz="1400" dirty="0"/>
           </a:p>
           <a:p>
-            <a:pPr algn="l" indent="0" marL="0">
+            <a:pPr marL="0" indent="0" algn="l">
               <a:lnSpc>
                 <a:spcPct val="112000"/>
               </a:lnSpc>
@@ -3586,7 +3297,7 @@
             <a:endParaRPr lang="en-US" sz="1400" dirty="0"/>
           </a:p>
           <a:p>
-            <a:pPr algn="l" indent="0" marL="0">
+            <a:pPr marL="0" indent="0" algn="l">
               <a:lnSpc>
                 <a:spcPct val="112000"/>
               </a:lnSpc>
@@ -3623,6 +3334,7 @@
         <a:solidFill>
           <a:srgbClr val="1E1526"/>
         </a:solidFill>
+        <a:effectLst/>
       </p:bgPr>
     </p:bg>
     <p:spTree>
@@ -3660,11 +3372,11 @@
           <a:bodyPr wrap="square" lIns="0" tIns="0" rIns="0" bIns="0" rtlCol="0" anchor="ctr"/>
           <a:lstStyle/>
           <a:p>
-            <a:pPr indent="0" marL="0">
-              <a:buNone/>
-            </a:pPr>
-            <a:r>
-              <a:rPr lang="en-US" sz="1200" b="1" spc="200" kern="0" dirty="0">
+            <a:pPr marL="0" indent="0">
+              <a:buNone/>
+            </a:pPr>
+            <a:r>
+              <a:rPr lang="en-US" sz="1200" b="1" kern="0" spc="200" dirty="0">
                 <a:solidFill>
                   <a:srgbClr val="9B72D0"/>
                 </a:solidFill>
@@ -3699,7 +3411,7 @@
           <a:bodyPr wrap="square" lIns="0" tIns="0" rIns="0" bIns="0" rtlCol="0" anchor="ctr"/>
           <a:lstStyle/>
           <a:p>
-            <a:pPr algn="l" indent="0" marL="0">
+            <a:pPr marL="0" indent="0" algn="l">
               <a:buNone/>
             </a:pPr>
             <a:r>
@@ -3760,11 +3472,11 @@
           <a:bodyPr wrap="square" lIns="0" tIns="0" rIns="0" bIns="0" rtlCol="0" anchor="ctr"/>
           <a:lstStyle/>
           <a:p>
-            <a:pPr algn="ctr" indent="0" marL="0">
-              <a:buNone/>
-            </a:pPr>
-            <a:r>
-              <a:rPr lang="en-US" sz="1300" b="1" spc="100" kern="0" dirty="0">
+            <a:pPr marL="0" indent="0" algn="ctr">
+              <a:buNone/>
+            </a:pPr>
+            <a:r>
+              <a:rPr lang="en-US" sz="1300" b="1" kern="0" spc="100" dirty="0">
                 <a:solidFill>
                   <a:srgbClr val="FFFFFF"/>
                 </a:solidFill>
@@ -3799,7 +3511,7 @@
           <a:bodyPr wrap="square" lIns="0" tIns="0" rIns="0" bIns="0" rtlCol="0" anchor="ctr"/>
           <a:lstStyle/>
           <a:p>
-            <a:pPr algn="r" indent="0" marL="0">
+            <a:pPr marL="0" indent="0" algn="r">
               <a:buNone/>
             </a:pPr>
             <a:r>
@@ -3925,7 +3637,7 @@
           <a:bodyPr wrap="square" lIns="0" tIns="0" rIns="0" bIns="0" rtlCol="0" anchor="t"/>
           <a:lstStyle/>
           <a:p>
-            <a:pPr algn="l" indent="0" marL="0">
+            <a:pPr marL="0" indent="0" algn="l">
               <a:lnSpc>
                 <a:spcPct val="112000"/>
               </a:lnSpc>
@@ -3945,7 +3657,7 @@
             <a:endParaRPr lang="en-US" sz="1350" dirty="0"/>
           </a:p>
           <a:p>
-            <a:pPr algn="l" indent="0" marL="0">
+            <a:pPr marL="0" indent="0" algn="l">
               <a:lnSpc>
                 <a:spcPct val="112000"/>
               </a:lnSpc>
@@ -3965,7 +3677,7 @@
             <a:endParaRPr lang="en-US" sz="1350" dirty="0"/>
           </a:p>
           <a:p>
-            <a:pPr algn="l" indent="0" marL="0">
+            <a:pPr marL="0" indent="0" algn="l">
               <a:lnSpc>
                 <a:spcPct val="112000"/>
               </a:lnSpc>
@@ -3985,7 +3697,7 @@
             <a:endParaRPr lang="en-US" sz="1350" dirty="0"/>
           </a:p>
           <a:p>
-            <a:pPr algn="l" indent="0" marL="0">
+            <a:pPr marL="0" indent="0" algn="l">
               <a:lnSpc>
                 <a:spcPct val="112000"/>
               </a:lnSpc>
@@ -4005,7 +3717,7 @@
             <a:endParaRPr lang="en-US" sz="1350" dirty="0"/>
           </a:p>
           <a:p>
-            <a:pPr algn="l" indent="0" marL="0">
+            <a:pPr marL="0" indent="0" algn="l">
               <a:lnSpc>
                 <a:spcPct val="112000"/>
               </a:lnSpc>
@@ -4025,7 +3737,7 @@
             <a:endParaRPr lang="en-US" sz="1350" dirty="0"/>
           </a:p>
           <a:p>
-            <a:pPr algn="l" indent="0" marL="0">
+            <a:pPr marL="0" indent="0" algn="l">
               <a:lnSpc>
                 <a:spcPct val="112000"/>
               </a:lnSpc>
@@ -4067,7 +3779,7 @@
           <a:bodyPr wrap="square" lIns="0" tIns="0" rIns="0" bIns="0" rtlCol="0" anchor="ctr"/>
           <a:lstStyle/>
           <a:p>
-            <a:pPr indent="0" marL="0">
+            <a:pPr marL="0" indent="0">
               <a:buNone/>
             </a:pPr>
             <a:r>
@@ -4126,7 +3838,7 @@
           <a:bodyPr wrap="square" lIns="0" tIns="0" rIns="0" bIns="0" rtlCol="0" anchor="ctr"/>
           <a:lstStyle/>
           <a:p>
-            <a:pPr indent="0" marL="0">
+            <a:pPr marL="0" indent="0">
               <a:buNone/>
             </a:pPr>
             <a:r>
@@ -4140,9 +3852,6 @@
               </a:rPr>
               <a:t>sacar(conta, valor)   </a:t>
             </a:r>
-            <a:pPr indent="0" marL="0">
-              <a:buNone/>
-            </a:pPr>
             <a:r>
               <a:rPr lang="en-US" sz="1300" dirty="0">
                 <a:solidFill>
@@ -4199,7 +3908,7 @@
           <a:bodyPr wrap="square" lIns="0" tIns="0" rIns="0" bIns="0" rtlCol="0" anchor="ctr"/>
           <a:lstStyle/>
           <a:p>
-            <a:pPr indent="0" marL="0">
+            <a:pPr marL="0" indent="0">
               <a:buNone/>
             </a:pPr>
             <a:r>
@@ -4213,9 +3922,6 @@
               </a:rPr>
               <a:t>addAoCarrinho(cart, item)   </a:t>
             </a:r>
-            <a:pPr indent="0" marL="0">
-              <a:buNone/>
-            </a:pPr>
             <a:r>
               <a:rPr lang="en-US" sz="1300" dirty="0">
                 <a:solidFill>
@@ -4272,7 +3978,7 @@
           <a:bodyPr wrap="square" lIns="0" tIns="0" rIns="0" bIns="0" rtlCol="0" anchor="ctr"/>
           <a:lstStyle/>
           <a:p>
-            <a:pPr indent="0" marL="0">
+            <a:pPr marL="0" indent="0">
               <a:buNone/>
             </a:pPr>
             <a:r>
@@ -4286,9 +3992,6 @@
               </a:rPr>
               <a:t>darBaixaEstoque(prod, qtd)   </a:t>
             </a:r>
-            <a:pPr indent="0" marL="0">
-              <a:buNone/>
-            </a:pPr>
             <a:r>
               <a:rPr lang="en-US" sz="1300" dirty="0">
                 <a:solidFill>
@@ -4352,7 +4055,7 @@
           <a:bodyPr wrap="square" lIns="0" tIns="0" rIns="0" bIns="0" rtlCol="0" anchor="ctr"/>
           <a:lstStyle/>
           <a:p>
-            <a:pPr algn="l" indent="0" marL="0">
+            <a:pPr marL="0" indent="0" algn="l">
               <a:buNone/>
             </a:pPr>
             <a:r>
@@ -4386,6 +4089,7 @@
         <a:solidFill>
           <a:srgbClr val="271C33"/>
         </a:solidFill>
+        <a:effectLst/>
       </p:bgPr>
     </p:bg>
     <p:spTree>
@@ -4463,11 +4167,11 @@
           <a:bodyPr wrap="square" lIns="0" tIns="0" rIns="0" bIns="0" rtlCol="0" anchor="ctr"/>
           <a:lstStyle/>
           <a:p>
-            <a:pPr indent="0" marL="0">
-              <a:buNone/>
-            </a:pPr>
-            <a:r>
-              <a:rPr lang="en-US" sz="1500" b="1" spc="300" kern="0" dirty="0">
+            <a:pPr marL="0" indent="0">
+              <a:buNone/>
+            </a:pPr>
+            <a:r>
+              <a:rPr lang="en-US" sz="1500" b="1" kern="0" spc="300" dirty="0">
                 <a:solidFill>
                   <a:srgbClr val="9B72D0"/>
                 </a:solidFill>
@@ -4502,7 +4206,7 @@
           <a:bodyPr wrap="square" lIns="0" tIns="0" rIns="0" bIns="0" rtlCol="0" anchor="ctr"/>
           <a:lstStyle/>
           <a:p>
-            <a:pPr indent="0" marL="0">
+            <a:pPr marL="0" indent="0">
               <a:buNone/>
             </a:pPr>
             <a:r>
@@ -4568,7 +4272,7 @@
           <a:bodyPr wrap="square" lIns="0" tIns="0" rIns="0" bIns="0" rtlCol="0" anchor="ctr"/>
           <a:lstStyle/>
           <a:p>
-            <a:pPr indent="0" marL="0">
+            <a:pPr marL="0" indent="0">
               <a:lnSpc>
                 <a:spcPct val="115000"/>
               </a:lnSpc>
@@ -4588,7 +4292,7 @@
             <a:endParaRPr lang="en-US" sz="1900" dirty="0"/>
           </a:p>
           <a:p>
-            <a:pPr indent="0" marL="0">
+            <a:pPr marL="0" indent="0">
               <a:lnSpc>
                 <a:spcPct val="115000"/>
               </a:lnSpc>
@@ -4597,7 +4301,7 @@
             <a:endParaRPr lang="en-US" sz="1900" dirty="0"/>
           </a:p>
           <a:p>
-            <a:pPr indent="0" marL="0">
+            <a:pPr marL="0" indent="0">
               <a:lnSpc>
                 <a:spcPct val="115000"/>
               </a:lnSpc>
@@ -4620,67 +4324,6 @@
       </p:sp>
       <p:sp>
         <p:nvSpPr>
-          <p:cNvPr id="8" name="Shape 6"/>
-          <p:cNvSpPr/>
-          <p:nvPr/>
-        </p:nvSpPr>
-        <p:spPr>
-          <a:xfrm>
-            <a:off x="731520" y="5212080"/>
-            <a:ext cx="2743200" cy="640080"/>
-          </a:xfrm>
-          <a:prstGeom prst="roundRect">
-            <a:avLst>
-              <a:gd name="adj" fmla="val 12857"/>
-            </a:avLst>
-          </a:prstGeom>
-          <a:solidFill>
-            <a:srgbClr val="6D4AA0"/>
-          </a:solidFill>
-          <a:ln/>
-        </p:spPr>
-      </p:sp>
-      <p:sp>
-        <p:nvSpPr>
-          <p:cNvPr id="9" name="Text 7"/>
-          <p:cNvSpPr/>
-          <p:nvPr/>
-        </p:nvSpPr>
-        <p:spPr>
-          <a:xfrm>
-            <a:off x="731520" y="5212080"/>
-            <a:ext cx="2743200" cy="640080"/>
-          </a:xfrm>
-          <a:prstGeom prst="rect">
-            <a:avLst/>
-          </a:prstGeom>
-          <a:noFill/>
-          <a:ln/>
-        </p:spPr>
-        <p:txBody>
-          <a:bodyPr wrap="square" lIns="0" tIns="0" rIns="0" bIns="0" rtlCol="0" anchor="ctr"/>
-          <a:lstStyle/>
-          <a:p>
-            <a:pPr algn="ctr" indent="0" marL="0">
-              <a:buNone/>
-            </a:pPr>
-            <a:r>
-              <a:rPr lang="en-US" sz="1600" b="1" dirty="0">
-                <a:solidFill>
-                  <a:srgbClr val="FFFFFF"/>
-                </a:solidFill>
-                <a:latin typeface="Calibri" pitchFamily="34" charset="0"/>
-                <a:ea typeface="Calibri" pitchFamily="34" charset="-122"/>
-                <a:cs typeface="Calibri" pitchFamily="34" charset="-120"/>
-              </a:rPr>
-              <a:t>≈ 10 min · em duplas</a:t>
-            </a:r>
-            <a:endParaRPr lang="en-US" sz="1600" dirty="0"/>
-          </a:p>
-        </p:txBody>
-      </p:sp>
-      <p:sp>
-        <p:nvSpPr>
           <p:cNvPr id="10" name="Text 8"/>
           <p:cNvSpPr/>
           <p:nvPr/>
@@ -4700,7 +4343,7 @@
           <a:bodyPr wrap="square" lIns="0" tIns="0" rIns="0" bIns="0" rtlCol="0" anchor="ctr"/>
           <a:lstStyle/>
           <a:p>
-            <a:pPr algn="r" indent="0" marL="0">
+            <a:pPr marL="0" indent="0" algn="r">
               <a:buNone/>
             </a:pPr>
             <a:r>
@@ -4734,6 +4377,7 @@
         <a:solidFill>
           <a:srgbClr val="1E1526"/>
         </a:solidFill>
+        <a:effectLst/>
       </p:bgPr>
     </p:bg>
     <p:spTree>
@@ -4771,11 +4415,11 @@
           <a:bodyPr wrap="square" lIns="0" tIns="0" rIns="0" bIns="0" rtlCol="0" anchor="ctr"/>
           <a:lstStyle/>
           <a:p>
-            <a:pPr indent="0" marL="0">
-              <a:buNone/>
-            </a:pPr>
-            <a:r>
-              <a:rPr lang="en-US" sz="1200" b="1" spc="200" kern="0" dirty="0">
+            <a:pPr marL="0" indent="0">
+              <a:buNone/>
+            </a:pPr>
+            <a:r>
+              <a:rPr lang="en-US" sz="1200" b="1" kern="0" spc="200" dirty="0">
                 <a:solidFill>
                   <a:srgbClr val="9B72D0"/>
                 </a:solidFill>
@@ -4810,7 +4454,7 @@
           <a:bodyPr wrap="square" lIns="0" tIns="0" rIns="0" bIns="0" rtlCol="0" anchor="ctr"/>
           <a:lstStyle/>
           <a:p>
-            <a:pPr algn="l" indent="0" marL="0">
+            <a:pPr marL="0" indent="0" algn="l">
               <a:buNone/>
             </a:pPr>
             <a:r>
@@ -4871,11 +4515,11 @@
           <a:bodyPr wrap="square" lIns="0" tIns="0" rIns="0" bIns="0" rtlCol="0" anchor="ctr"/>
           <a:lstStyle/>
           <a:p>
-            <a:pPr algn="ctr" indent="0" marL="0">
-              <a:buNone/>
-            </a:pPr>
-            <a:r>
-              <a:rPr lang="en-US" sz="1300" b="1" spc="100" kern="0" dirty="0">
+            <a:pPr marL="0" indent="0" algn="ctr">
+              <a:buNone/>
+            </a:pPr>
+            <a:r>
+              <a:rPr lang="en-US" sz="1300" b="1" kern="0" spc="100" dirty="0">
                 <a:solidFill>
                   <a:srgbClr val="FFFFFF"/>
                 </a:solidFill>
@@ -4910,7 +4554,7 @@
           <a:bodyPr wrap="square" lIns="0" tIns="0" rIns="0" bIns="0" rtlCol="0" anchor="ctr"/>
           <a:lstStyle/>
           <a:p>
-            <a:pPr algn="r" indent="0" marL="0">
+            <a:pPr marL="0" indent="0" algn="r">
               <a:buNone/>
             </a:pPr>
             <a:r>
@@ -4949,7 +4593,7 @@
           <a:bodyPr wrap="square" lIns="0" tIns="0" rIns="0" bIns="0" rtlCol="0" anchor="t"/>
           <a:lstStyle/>
           <a:p>
-            <a:pPr algn="l" marL="203200" indent="-203200">
+            <a:pPr marL="203200" indent="-203200" algn="l">
               <a:spcAft>
                 <a:spcPts val="1100"/>
               </a:spcAft>
@@ -4970,7 +4614,7 @@
             <a:endParaRPr lang="en-US" sz="1600" dirty="0"/>
           </a:p>
           <a:p>
-            <a:pPr algn="l" marL="203200" indent="-203200">
+            <a:pPr marL="203200" indent="-203200" algn="l">
               <a:spcAft>
                 <a:spcPts val="1100"/>
               </a:spcAft>
@@ -4991,7 +4635,7 @@
             <a:endParaRPr lang="en-US" sz="1600" dirty="0"/>
           </a:p>
           <a:p>
-            <a:pPr algn="l" marL="203200" indent="-203200">
+            <a:pPr marL="203200" indent="-203200" algn="l">
               <a:spcAft>
                 <a:spcPts val="1100"/>
               </a:spcAft>
@@ -5034,7 +4678,7 @@
           <a:bodyPr wrap="square" lIns="0" tIns="0" rIns="0" bIns="0" rtlCol="0" anchor="ctr"/>
           <a:lstStyle/>
           <a:p>
-            <a:pPr indent="0" marL="0">
+            <a:pPr marL="0" indent="0">
               <a:buNone/>
             </a:pPr>
             <a:r>
@@ -5073,7 +4717,7 @@
           <a:bodyPr wrap="square" lIns="0" tIns="0" rIns="0" bIns="0" rtlCol="0" anchor="ctr"/>
           <a:lstStyle/>
           <a:p>
-            <a:pPr indent="0" marL="0">
+            <a:pPr marL="0" indent="0">
               <a:lnSpc>
                 <a:spcPct val="120000"/>
               </a:lnSpc>
@@ -5202,7 +4846,7 @@
           <a:bodyPr wrap="square" lIns="0" tIns="0" rIns="0" bIns="0" rtlCol="0" anchor="t"/>
           <a:lstStyle/>
           <a:p>
-            <a:pPr algn="l" indent="0" marL="0">
+            <a:pPr marL="0" indent="0" algn="l">
               <a:lnSpc>
                 <a:spcPct val="112000"/>
               </a:lnSpc>
@@ -5222,7 +4866,7 @@
             <a:endParaRPr lang="en-US" sz="1400" dirty="0"/>
           </a:p>
           <a:p>
-            <a:pPr algn="l" indent="0" marL="0">
+            <a:pPr marL="0" indent="0" algn="l">
               <a:lnSpc>
                 <a:spcPct val="112000"/>
               </a:lnSpc>
@@ -5242,7 +4886,7 @@
             <a:endParaRPr lang="en-US" sz="1400" dirty="0"/>
           </a:p>
           <a:p>
-            <a:pPr algn="l" indent="0" marL="0">
+            <a:pPr marL="0" indent="0" algn="l">
               <a:lnSpc>
                 <a:spcPct val="112000"/>
               </a:lnSpc>
@@ -5262,7 +4906,7 @@
             <a:endParaRPr lang="en-US" sz="1400" dirty="0"/>
           </a:p>
           <a:p>
-            <a:pPr algn="l" indent="0" marL="0">
+            <a:pPr marL="0" indent="0" algn="l">
               <a:lnSpc>
                 <a:spcPct val="112000"/>
               </a:lnSpc>
@@ -5282,7 +4926,7 @@
             <a:endParaRPr lang="en-US" sz="1400" dirty="0"/>
           </a:p>
           <a:p>
-            <a:pPr algn="l" indent="0" marL="0">
+            <a:pPr marL="0" indent="0" algn="l">
               <a:lnSpc>
                 <a:spcPct val="112000"/>
               </a:lnSpc>
@@ -5319,6 +4963,7 @@
         <a:solidFill>
           <a:srgbClr val="271C33"/>
         </a:solidFill>
+        <a:effectLst/>
       </p:bgPr>
     </p:bg>
     <p:spTree>
@@ -5396,11 +5041,11 @@
           <a:bodyPr wrap="square" lIns="0" tIns="0" rIns="0" bIns="0" rtlCol="0" anchor="ctr"/>
           <a:lstStyle/>
           <a:p>
-            <a:pPr indent="0" marL="0">
-              <a:buNone/>
-            </a:pPr>
-            <a:r>
-              <a:rPr lang="en-US" sz="1500" b="1" spc="300" kern="0" dirty="0">
+            <a:pPr marL="0" indent="0">
+              <a:buNone/>
+            </a:pPr>
+            <a:r>
+              <a:rPr lang="en-US" sz="1500" b="1" kern="0" spc="300" dirty="0">
                 <a:solidFill>
                   <a:srgbClr val="9B72D0"/>
                 </a:solidFill>
@@ -5435,7 +5080,7 @@
           <a:bodyPr wrap="square" lIns="0" tIns="0" rIns="0" bIns="0" rtlCol="0" anchor="ctr"/>
           <a:lstStyle/>
           <a:p>
-            <a:pPr indent="0" marL="0">
+            <a:pPr marL="0" indent="0">
               <a:buNone/>
             </a:pPr>
             <a:r>
@@ -5501,7 +5146,7 @@
           <a:bodyPr wrap="square" lIns="0" tIns="0" rIns="0" bIns="0" rtlCol="0" anchor="ctr"/>
           <a:lstStyle/>
           <a:p>
-            <a:pPr indent="0" marL="0">
+            <a:pPr marL="0" indent="0">
               <a:lnSpc>
                 <a:spcPct val="115000"/>
               </a:lnSpc>
@@ -5521,7 +5166,7 @@
             <a:endParaRPr lang="en-US" sz="1900" dirty="0"/>
           </a:p>
           <a:p>
-            <a:pPr indent="0" marL="0">
+            <a:pPr marL="0" indent="0">
               <a:lnSpc>
                 <a:spcPct val="115000"/>
               </a:lnSpc>
@@ -5530,7 +5175,7 @@
             <a:endParaRPr lang="en-US" sz="1900" dirty="0"/>
           </a:p>
           <a:p>
-            <a:pPr indent="0" marL="0">
+            <a:pPr marL="0" indent="0">
               <a:lnSpc>
                 <a:spcPct val="115000"/>
               </a:lnSpc>
@@ -5553,67 +5198,6 @@
       </p:sp>
       <p:sp>
         <p:nvSpPr>
-          <p:cNvPr id="8" name="Shape 6"/>
-          <p:cNvSpPr/>
-          <p:nvPr/>
-        </p:nvSpPr>
-        <p:spPr>
-          <a:xfrm>
-            <a:off x="731520" y="5212080"/>
-            <a:ext cx="2743200" cy="640080"/>
-          </a:xfrm>
-          <a:prstGeom prst="roundRect">
-            <a:avLst>
-              <a:gd name="adj" fmla="val 12857"/>
-            </a:avLst>
-          </a:prstGeom>
-          <a:solidFill>
-            <a:srgbClr val="6D4AA0"/>
-          </a:solidFill>
-          <a:ln/>
-        </p:spPr>
-      </p:sp>
-      <p:sp>
-        <p:nvSpPr>
-          <p:cNvPr id="9" name="Text 7"/>
-          <p:cNvSpPr/>
-          <p:nvPr/>
-        </p:nvSpPr>
-        <p:spPr>
-          <a:xfrm>
-            <a:off x="731520" y="5212080"/>
-            <a:ext cx="2743200" cy="640080"/>
-          </a:xfrm>
-          <a:prstGeom prst="rect">
-            <a:avLst/>
-          </a:prstGeom>
-          <a:noFill/>
-          <a:ln/>
-        </p:spPr>
-        <p:txBody>
-          <a:bodyPr wrap="square" lIns="0" tIns="0" rIns="0" bIns="0" rtlCol="0" anchor="ctr"/>
-          <a:lstStyle/>
-          <a:p>
-            <a:pPr algn="ctr" indent="0" marL="0">
-              <a:buNone/>
-            </a:pPr>
-            <a:r>
-              <a:rPr lang="en-US" sz="1600" b="1" dirty="0">
-                <a:solidFill>
-                  <a:srgbClr val="FFFFFF"/>
-                </a:solidFill>
-                <a:latin typeface="Calibri" pitchFamily="34" charset="0"/>
-                <a:ea typeface="Calibri" pitchFamily="34" charset="-122"/>
-                <a:cs typeface="Calibri" pitchFamily="34" charset="-120"/>
-              </a:rPr>
-              <a:t>≈ 12 min · em duplas</a:t>
-            </a:r>
-            <a:endParaRPr lang="en-US" sz="1600" dirty="0"/>
-          </a:p>
-        </p:txBody>
-      </p:sp>
-      <p:sp>
-        <p:nvSpPr>
           <p:cNvPr id="10" name="Text 8"/>
           <p:cNvSpPr/>
           <p:nvPr/>
@@ -5633,7 +5217,7 @@
           <a:bodyPr wrap="square" lIns="0" tIns="0" rIns="0" bIns="0" rtlCol="0" anchor="ctr"/>
           <a:lstStyle/>
           <a:p>
-            <a:pPr algn="r" indent="0" marL="0">
+            <a:pPr marL="0" indent="0" algn="r">
               <a:buNone/>
             </a:pPr>
             <a:r>
@@ -5667,6 +5251,7 @@
         <a:solidFill>
           <a:srgbClr val="1E1526"/>
         </a:solidFill>
+        <a:effectLst/>
       </p:bgPr>
     </p:bg>
     <p:spTree>
@@ -5704,11 +5289,11 @@
           <a:bodyPr wrap="square" lIns="0" tIns="0" rIns="0" bIns="0" rtlCol="0" anchor="ctr"/>
           <a:lstStyle/>
           <a:p>
-            <a:pPr indent="0" marL="0">
-              <a:buNone/>
-            </a:pPr>
-            <a:r>
-              <a:rPr lang="en-US" sz="1200" b="1" spc="200" kern="0" dirty="0">
+            <a:pPr marL="0" indent="0">
+              <a:buNone/>
+            </a:pPr>
+            <a:r>
+              <a:rPr lang="en-US" sz="1200" b="1" kern="0" spc="200" dirty="0">
                 <a:solidFill>
                   <a:srgbClr val="9B72D0"/>
                 </a:solidFill>
@@ -5743,7 +5328,7 @@
           <a:bodyPr wrap="square" lIns="0" tIns="0" rIns="0" bIns="0" rtlCol="0" anchor="ctr"/>
           <a:lstStyle/>
           <a:p>
-            <a:pPr algn="l" indent="0" marL="0">
+            <a:pPr marL="0" indent="0" algn="l">
               <a:buNone/>
             </a:pPr>
             <a:r>
@@ -5782,7 +5367,7 @@
           <a:bodyPr wrap="square" lIns="0" tIns="0" rIns="0" bIns="0" rtlCol="0" anchor="ctr"/>
           <a:lstStyle/>
           <a:p>
-            <a:pPr algn="r" indent="0" marL="0">
+            <a:pPr marL="0" indent="0" algn="r">
               <a:buNone/>
             </a:pPr>
             <a:r>
@@ -5843,7 +5428,7 @@
           <a:bodyPr wrap="square" lIns="0" tIns="0" rIns="0" bIns="0" rtlCol="0" anchor="ctr"/>
           <a:lstStyle/>
           <a:p>
-            <a:pPr algn="ctr" indent="0" marL="0">
+            <a:pPr marL="0" indent="0" algn="ctr">
               <a:buNone/>
             </a:pPr>
             <a:r>
@@ -5882,7 +5467,7 @@
           <a:bodyPr wrap="square" lIns="0" tIns="0" rIns="0" bIns="0" rtlCol="0" anchor="ctr"/>
           <a:lstStyle/>
           <a:p>
-            <a:pPr algn="ctr" indent="0" marL="0">
+            <a:pPr marL="0" indent="0" algn="ctr">
               <a:buNone/>
             </a:pPr>
             <a:r>
@@ -5921,7 +5506,7 @@
           <a:bodyPr wrap="square" lIns="0" tIns="0" rIns="0" bIns="0" rtlCol="0" anchor="ctr"/>
           <a:lstStyle/>
           <a:p>
-            <a:pPr algn="ctr" indent="0" marL="0">
+            <a:pPr marL="0" indent="0" algn="ctr">
               <a:buNone/>
             </a:pPr>
             <a:r>
@@ -5979,7 +5564,7 @@
           <a:bodyPr wrap="square" lIns="0" tIns="0" rIns="0" bIns="0" rtlCol="0" anchor="ctr"/>
           <a:lstStyle/>
           <a:p>
-            <a:pPr algn="ctr" indent="0" marL="0">
+            <a:pPr marL="0" indent="0" algn="ctr">
               <a:buNone/>
             </a:pPr>
             <a:r>
@@ -6018,7 +5603,7 @@
           <a:bodyPr wrap="square" lIns="0" tIns="0" rIns="0" bIns="0" rtlCol="0" anchor="ctr"/>
           <a:lstStyle/>
           <a:p>
-            <a:pPr algn="ctr" indent="0" marL="0">
+            <a:pPr marL="0" indent="0" algn="ctr">
               <a:buNone/>
             </a:pPr>
             <a:r>
@@ -6057,7 +5642,7 @@
           <a:bodyPr wrap="square" lIns="0" tIns="0" rIns="0" bIns="0" rtlCol="0" anchor="ctr"/>
           <a:lstStyle/>
           <a:p>
-            <a:pPr algn="ctr" indent="0" marL="0">
+            <a:pPr marL="0" indent="0" algn="ctr">
               <a:buNone/>
             </a:pPr>
             <a:r>
@@ -6115,7 +5700,7 @@
           <a:bodyPr wrap="square" lIns="0" tIns="0" rIns="0" bIns="0" rtlCol="0" anchor="ctr"/>
           <a:lstStyle/>
           <a:p>
-            <a:pPr algn="ctr" indent="0" marL="0">
+            <a:pPr marL="0" indent="0" algn="ctr">
               <a:buNone/>
             </a:pPr>
             <a:r>
@@ -6154,7 +5739,7 @@
           <a:bodyPr wrap="square" lIns="0" tIns="0" rIns="0" bIns="0" rtlCol="0" anchor="ctr"/>
           <a:lstStyle/>
           <a:p>
-            <a:pPr algn="ctr" indent="0" marL="0">
+            <a:pPr marL="0" indent="0" algn="ctr">
               <a:buNone/>
             </a:pPr>
             <a:r>
@@ -6193,7 +5778,7 @@
           <a:bodyPr wrap="square" lIns="0" tIns="0" rIns="0" bIns="0" rtlCol="0" anchor="ctr"/>
           <a:lstStyle/>
           <a:p>
-            <a:pPr algn="ctr" indent="0" marL="0">
+            <a:pPr marL="0" indent="0" algn="ctr">
               <a:buNone/>
             </a:pPr>
             <a:r>
@@ -6251,7 +5836,7 @@
           <a:bodyPr wrap="square" lIns="0" tIns="0" rIns="0" bIns="0" rtlCol="0" anchor="ctr"/>
           <a:lstStyle/>
           <a:p>
-            <a:pPr algn="ctr" indent="0" marL="0">
+            <a:pPr marL="0" indent="0" algn="ctr">
               <a:buNone/>
             </a:pPr>
             <a:r>
@@ -6290,7 +5875,7 @@
           <a:bodyPr wrap="square" lIns="0" tIns="0" rIns="0" bIns="0" rtlCol="0" anchor="ctr"/>
           <a:lstStyle/>
           <a:p>
-            <a:pPr algn="ctr" indent="0" marL="0">
+            <a:pPr marL="0" indent="0" algn="ctr">
               <a:buNone/>
             </a:pPr>
             <a:r>
@@ -6329,7 +5914,7 @@
           <a:bodyPr wrap="square" lIns="0" tIns="0" rIns="0" bIns="0" rtlCol="0" anchor="ctr"/>
           <a:lstStyle/>
           <a:p>
-            <a:pPr algn="ctr" indent="0" marL="0">
+            <a:pPr marL="0" indent="0" algn="ctr">
               <a:buNone/>
             </a:pPr>
             <a:r>
@@ -6387,7 +5972,7 @@
           <a:bodyPr wrap="square" lIns="0" tIns="0" rIns="0" bIns="0" rtlCol="0" anchor="ctr"/>
           <a:lstStyle/>
           <a:p>
-            <a:pPr algn="ctr" indent="0" marL="0">
+            <a:pPr marL="0" indent="0" algn="ctr">
               <a:buNone/>
             </a:pPr>
             <a:r>
@@ -6426,7 +6011,7 @@
           <a:bodyPr wrap="square" lIns="0" tIns="0" rIns="0" bIns="0" rtlCol="0" anchor="ctr"/>
           <a:lstStyle/>
           <a:p>
-            <a:pPr algn="ctr" indent="0" marL="0">
+            <a:pPr marL="0" indent="0" algn="ctr">
               <a:buNone/>
             </a:pPr>
             <a:r>
@@ -6492,7 +6077,7 @@
           <a:bodyPr wrap="square" lIns="0" tIns="0" rIns="0" bIns="0" rtlCol="0" anchor="ctr"/>
           <a:lstStyle/>
           <a:p>
-            <a:pPr algn="l" indent="0" marL="0">
+            <a:pPr marL="0" indent="0" algn="l">
               <a:buNone/>
             </a:pPr>
             <a:r>
@@ -6526,6 +6111,7 @@
         <a:solidFill>
           <a:srgbClr val="1E1526"/>
         </a:solidFill>
+        <a:effectLst/>
       </p:bgPr>
     </p:bg>
     <p:spTree>
@@ -6603,11 +6189,11 @@
           <a:bodyPr wrap="square" lIns="0" tIns="0" rIns="0" bIns="0" rtlCol="0" anchor="ctr"/>
           <a:lstStyle/>
           <a:p>
-            <a:pPr indent="0" marL="0">
-              <a:buNone/>
-            </a:pPr>
-            <a:r>
-              <a:rPr lang="en-US" sz="1200" b="1" spc="200" kern="0" dirty="0">
+            <a:pPr marL="0" indent="0">
+              <a:buNone/>
+            </a:pPr>
+            <a:r>
+              <a:rPr lang="en-US" sz="1200" b="1" kern="0" spc="200" dirty="0">
                 <a:solidFill>
                   <a:srgbClr val="9B72D0"/>
                 </a:solidFill>
@@ -6642,7 +6228,7 @@
           <a:bodyPr wrap="square" lIns="0" tIns="0" rIns="0" bIns="0" rtlCol="0" anchor="ctr"/>
           <a:lstStyle/>
           <a:p>
-            <a:pPr indent="0" marL="0">
+            <a:pPr marL="0" indent="0">
               <a:buNone/>
             </a:pPr>
             <a:r>
@@ -6681,7 +6267,7 @@
           <a:bodyPr wrap="square" lIns="0" tIns="0" rIns="0" bIns="0" rtlCol="0" anchor="t"/>
           <a:lstStyle/>
           <a:p>
-            <a:pPr algn="l" marL="203200" indent="-203200">
+            <a:pPr marL="203200" indent="-203200" algn="l">
               <a:spcAft>
                 <a:spcPts val="1100"/>
               </a:spcAft>
@@ -6702,7 +6288,7 @@
             <a:endParaRPr lang="en-US" sz="1700" dirty="0"/>
           </a:p>
           <a:p>
-            <a:pPr algn="l" marL="203200" indent="-203200">
+            <a:pPr marL="203200" indent="-203200" algn="l">
               <a:spcAft>
                 <a:spcPts val="1100"/>
               </a:spcAft>
@@ -6723,7 +6309,7 @@
             <a:endParaRPr lang="en-US" sz="1700" dirty="0"/>
           </a:p>
           <a:p>
-            <a:pPr algn="l" marL="203200" indent="-203200">
+            <a:pPr marL="203200" indent="-203200" algn="l">
               <a:spcAft>
                 <a:spcPts val="1100"/>
               </a:spcAft>
@@ -6744,7 +6330,7 @@
             <a:endParaRPr lang="en-US" sz="1700" dirty="0"/>
           </a:p>
           <a:p>
-            <a:pPr algn="l" marL="203200" indent="-203200">
+            <a:pPr marL="203200" indent="-203200" algn="l">
               <a:spcAft>
                 <a:spcPts val="1100"/>
               </a:spcAft>
@@ -6765,7 +6351,7 @@
             <a:endParaRPr lang="en-US" sz="1700" dirty="0"/>
           </a:p>
           <a:p>
-            <a:pPr algn="l" marL="203200" indent="-203200">
+            <a:pPr marL="203200" indent="-203200" algn="l">
               <a:spcAft>
                 <a:spcPts val="1100"/>
               </a:spcAft>
@@ -6830,7 +6416,7 @@
           <a:bodyPr wrap="square" lIns="0" tIns="0" rIns="0" bIns="0" rtlCol="0" anchor="ctr"/>
           <a:lstStyle/>
           <a:p>
-            <a:pPr indent="0" marL="0">
+            <a:pPr marL="0" indent="0">
               <a:lnSpc>
                 <a:spcPct val="100000"/>
               </a:lnSpc>
@@ -6850,7 +6436,7 @@
             <a:endParaRPr lang="en-US" sz="3000" dirty="0"/>
           </a:p>
           <a:p>
-            <a:pPr indent="0" marL="0">
+            <a:pPr marL="0" indent="0">
               <a:lnSpc>
                 <a:spcPct val="100000"/>
               </a:lnSpc>
@@ -6870,7 +6456,7 @@
             <a:endParaRPr lang="en-US" sz="3000" dirty="0"/>
           </a:p>
           <a:p>
-            <a:pPr indent="0" marL="0">
+            <a:pPr marL="0" indent="0">
               <a:lnSpc>
                 <a:spcPct val="100000"/>
               </a:lnSpc>
@@ -6912,7 +6498,7 @@
           <a:bodyPr wrap="square" lIns="0" tIns="0" rIns="0" bIns="0" rtlCol="0" anchor="ctr"/>
           <a:lstStyle/>
           <a:p>
-            <a:pPr indent="0" marL="0">
+            <a:pPr marL="0" indent="0">
               <a:buNone/>
             </a:pPr>
             <a:r>
@@ -6951,7 +6537,7 @@
           <a:bodyPr wrap="square" lIns="0" tIns="0" rIns="0" bIns="0" rtlCol="0" anchor="ctr"/>
           <a:lstStyle/>
           <a:p>
-            <a:pPr algn="r" indent="0" marL="0">
+            <a:pPr marL="0" indent="0" algn="r">
               <a:buNone/>
             </a:pPr>
             <a:r>
@@ -6985,6 +6571,7 @@
         <a:solidFill>
           <a:srgbClr val="1E1526"/>
         </a:solidFill>
+        <a:effectLst/>
       </p:bgPr>
     </p:bg>
     <p:spTree>
@@ -7022,11 +6609,11 @@
           <a:bodyPr wrap="square" lIns="0" tIns="0" rIns="0" bIns="0" rtlCol="0" anchor="ctr"/>
           <a:lstStyle/>
           <a:p>
-            <a:pPr indent="0" marL="0">
-              <a:buNone/>
-            </a:pPr>
-            <a:r>
-              <a:rPr lang="en-US" sz="1200" b="1" spc="200" kern="0" dirty="0">
+            <a:pPr marL="0" indent="0">
+              <a:buNone/>
+            </a:pPr>
+            <a:r>
+              <a:rPr lang="en-US" sz="1200" b="1" kern="0" spc="200" dirty="0">
                 <a:solidFill>
                   <a:srgbClr val="9B72D0"/>
                 </a:solidFill>
@@ -7061,7 +6648,7 @@
           <a:bodyPr wrap="square" lIns="0" tIns="0" rIns="0" bIns="0" rtlCol="0" anchor="ctr"/>
           <a:lstStyle/>
           <a:p>
-            <a:pPr algn="l" indent="0" marL="0">
+            <a:pPr marL="0" indent="0" algn="l">
               <a:buNone/>
             </a:pPr>
             <a:r>
@@ -7100,7 +6687,7 @@
           <a:bodyPr wrap="square" lIns="0" tIns="0" rIns="0" bIns="0" rtlCol="0" anchor="ctr"/>
           <a:lstStyle/>
           <a:p>
-            <a:pPr algn="r" indent="0" marL="0">
+            <a:pPr marL="0" indent="0" algn="r">
               <a:buNone/>
             </a:pPr>
             <a:r>
@@ -7181,7 +6768,7 @@
           <a:bodyPr wrap="square" lIns="0" tIns="0" rIns="0" bIns="0" rtlCol="0" anchor="ctr"/>
           <a:lstStyle/>
           <a:p>
-            <a:pPr algn="ctr" indent="0" marL="0">
+            <a:pPr marL="0" indent="0" algn="ctr">
               <a:buNone/>
             </a:pPr>
             <a:r>
@@ -7220,7 +6807,7 @@
           <a:bodyPr wrap="square" lIns="0" tIns="0" rIns="0" bIns="0" rtlCol="0" anchor="ctr"/>
           <a:lstStyle/>
           <a:p>
-            <a:pPr algn="ctr" indent="0" marL="0">
+            <a:pPr marL="0" indent="0" algn="ctr">
               <a:buNone/>
             </a:pPr>
             <a:r>
@@ -7259,7 +6846,7 @@
           <a:bodyPr wrap="square" lIns="0" tIns="0" rIns="0" bIns="0" rtlCol="0" anchor="t"/>
           <a:lstStyle/>
           <a:p>
-            <a:pPr algn="ctr" indent="0" marL="0">
+            <a:pPr marL="0" indent="0" algn="ctr">
               <a:buNone/>
             </a:pPr>
             <a:r>
@@ -7298,7 +6885,7 @@
           <a:bodyPr wrap="square" lIns="0" tIns="0" rIns="0" bIns="0" rtlCol="0" anchor="ctr"/>
           <a:lstStyle/>
           <a:p>
-            <a:pPr algn="ctr" indent="0" marL="0">
+            <a:pPr marL="0" indent="0" algn="ctr">
               <a:buNone/>
             </a:pPr>
             <a:r>
@@ -7376,7 +6963,7 @@
           <a:bodyPr wrap="square" lIns="0" tIns="0" rIns="0" bIns="0" rtlCol="0" anchor="ctr"/>
           <a:lstStyle/>
           <a:p>
-            <a:pPr algn="ctr" indent="0" marL="0">
+            <a:pPr marL="0" indent="0" algn="ctr">
               <a:buNone/>
             </a:pPr>
             <a:r>
@@ -7415,7 +7002,7 @@
           <a:bodyPr wrap="square" lIns="0" tIns="0" rIns="0" bIns="0" rtlCol="0" anchor="ctr"/>
           <a:lstStyle/>
           <a:p>
-            <a:pPr algn="ctr" indent="0" marL="0">
+            <a:pPr marL="0" indent="0" algn="ctr">
               <a:buNone/>
             </a:pPr>
             <a:r>
@@ -7454,7 +7041,7 @@
           <a:bodyPr wrap="square" lIns="0" tIns="0" rIns="0" bIns="0" rtlCol="0" anchor="t"/>
           <a:lstStyle/>
           <a:p>
-            <a:pPr algn="ctr" indent="0" marL="0">
+            <a:pPr marL="0" indent="0" algn="ctr">
               <a:buNone/>
             </a:pPr>
             <a:r>
@@ -7493,7 +7080,7 @@
           <a:bodyPr wrap="square" lIns="0" tIns="0" rIns="0" bIns="0" rtlCol="0" anchor="ctr"/>
           <a:lstStyle/>
           <a:p>
-            <a:pPr algn="ctr" indent="0" marL="0">
+            <a:pPr marL="0" indent="0" algn="ctr">
               <a:buNone/>
             </a:pPr>
             <a:r>
@@ -7571,7 +7158,7 @@
           <a:bodyPr wrap="square" lIns="0" tIns="0" rIns="0" bIns="0" rtlCol="0" anchor="ctr"/>
           <a:lstStyle/>
           <a:p>
-            <a:pPr algn="ctr" indent="0" marL="0">
+            <a:pPr marL="0" indent="0" algn="ctr">
               <a:buNone/>
             </a:pPr>
             <a:r>
@@ -7610,7 +7197,7 @@
           <a:bodyPr wrap="square" lIns="0" tIns="0" rIns="0" bIns="0" rtlCol="0" anchor="ctr"/>
           <a:lstStyle/>
           <a:p>
-            <a:pPr algn="ctr" indent="0" marL="0">
+            <a:pPr marL="0" indent="0" algn="ctr">
               <a:buNone/>
             </a:pPr>
             <a:r>
@@ -7649,7 +7236,7 @@
           <a:bodyPr wrap="square" lIns="0" tIns="0" rIns="0" bIns="0" rtlCol="0" anchor="t"/>
           <a:lstStyle/>
           <a:p>
-            <a:pPr algn="ctr" indent="0" marL="0">
+            <a:pPr marL="0" indent="0" algn="ctr">
               <a:buNone/>
             </a:pPr>
             <a:r>
@@ -7688,7 +7275,7 @@
           <a:bodyPr wrap="square" lIns="0" tIns="0" rIns="0" bIns="0" rtlCol="0" anchor="ctr"/>
           <a:lstStyle/>
           <a:p>
-            <a:pPr algn="ctr" indent="0" marL="0">
+            <a:pPr marL="0" indent="0" algn="ctr">
               <a:buNone/>
             </a:pPr>
             <a:r>
@@ -7766,7 +7353,7 @@
           <a:bodyPr wrap="square" lIns="0" tIns="0" rIns="0" bIns="0" rtlCol="0" anchor="ctr"/>
           <a:lstStyle/>
           <a:p>
-            <a:pPr algn="ctr" indent="0" marL="0">
+            <a:pPr marL="0" indent="0" algn="ctr">
               <a:buNone/>
             </a:pPr>
             <a:r>
@@ -7805,7 +7392,7 @@
           <a:bodyPr wrap="square" lIns="0" tIns="0" rIns="0" bIns="0" rtlCol="0" anchor="ctr"/>
           <a:lstStyle/>
           <a:p>
-            <a:pPr algn="ctr" indent="0" marL="0">
+            <a:pPr marL="0" indent="0" algn="ctr">
               <a:buNone/>
             </a:pPr>
             <a:r>
@@ -7844,7 +7431,7 @@
           <a:bodyPr wrap="square" lIns="0" tIns="0" rIns="0" bIns="0" rtlCol="0" anchor="t"/>
           <a:lstStyle/>
           <a:p>
-            <a:pPr algn="ctr" indent="0" marL="0">
+            <a:pPr marL="0" indent="0" algn="ctr">
               <a:buNone/>
             </a:pPr>
             <a:r>
@@ -7883,7 +7470,7 @@
           <a:bodyPr wrap="square" lIns="0" tIns="0" rIns="0" bIns="0" rtlCol="0" anchor="ctr"/>
           <a:lstStyle/>
           <a:p>
-            <a:pPr algn="ctr" indent="0" marL="0">
+            <a:pPr marL="0" indent="0" algn="ctr">
               <a:buNone/>
             </a:pPr>
             <a:r>
@@ -7961,7 +7548,7 @@
           <a:bodyPr wrap="square" lIns="0" tIns="0" rIns="0" bIns="0" rtlCol="0" anchor="ctr"/>
           <a:lstStyle/>
           <a:p>
-            <a:pPr algn="ctr" indent="0" marL="0">
+            <a:pPr marL="0" indent="0" algn="ctr">
               <a:buNone/>
             </a:pPr>
             <a:r>
@@ -8000,7 +7587,7 @@
           <a:bodyPr wrap="square" lIns="0" tIns="0" rIns="0" bIns="0" rtlCol="0" anchor="ctr"/>
           <a:lstStyle/>
           <a:p>
-            <a:pPr algn="ctr" indent="0" marL="0">
+            <a:pPr marL="0" indent="0" algn="ctr">
               <a:buNone/>
             </a:pPr>
             <a:r>
@@ -8039,7 +7626,7 @@
           <a:bodyPr wrap="square" lIns="0" tIns="0" rIns="0" bIns="0" rtlCol="0" anchor="t"/>
           <a:lstStyle/>
           <a:p>
-            <a:pPr algn="ctr" indent="0" marL="0">
+            <a:pPr marL="0" indent="0" algn="ctr">
               <a:buNone/>
             </a:pPr>
             <a:r>
@@ -8105,7 +7692,7 @@
           <a:bodyPr wrap="square" lIns="0" tIns="0" rIns="0" bIns="0" rtlCol="0" anchor="ctr"/>
           <a:lstStyle/>
           <a:p>
-            <a:pPr algn="l" indent="0" marL="0">
+            <a:pPr marL="0" indent="0" algn="l">
               <a:buNone/>
             </a:pPr>
             <a:r>
@@ -8139,6 +7726,7 @@
         <a:solidFill>
           <a:srgbClr val="1E1526"/>
         </a:solidFill>
+        <a:effectLst/>
       </p:bgPr>
     </p:bg>
     <p:spTree>
@@ -8176,11 +7764,11 @@
           <a:bodyPr wrap="square" lIns="0" tIns="0" rIns="0" bIns="0" rtlCol="0" anchor="ctr"/>
           <a:lstStyle/>
           <a:p>
-            <a:pPr indent="0" marL="0">
-              <a:buNone/>
-            </a:pPr>
-            <a:r>
-              <a:rPr lang="en-US" sz="1200" b="1" spc="200" kern="0" dirty="0">
+            <a:pPr marL="0" indent="0">
+              <a:buNone/>
+            </a:pPr>
+            <a:r>
+              <a:rPr lang="en-US" sz="1200" b="1" kern="0" spc="200" dirty="0">
                 <a:solidFill>
                   <a:srgbClr val="9B72D0"/>
                 </a:solidFill>
@@ -8215,7 +7803,7 @@
           <a:bodyPr wrap="square" lIns="0" tIns="0" rIns="0" bIns="0" rtlCol="0" anchor="ctr"/>
           <a:lstStyle/>
           <a:p>
-            <a:pPr algn="l" indent="0" marL="0">
+            <a:pPr marL="0" indent="0" algn="l">
               <a:buNone/>
             </a:pPr>
             <a:r>
@@ -8254,7 +7842,7 @@
           <a:bodyPr wrap="square" lIns="0" tIns="0" rIns="0" bIns="0" rtlCol="0" anchor="ctr"/>
           <a:lstStyle/>
           <a:p>
-            <a:pPr algn="r" indent="0" marL="0">
+            <a:pPr marL="0" indent="0" algn="r">
               <a:buNone/>
             </a:pPr>
             <a:r>
@@ -8335,7 +7923,7 @@
           <a:bodyPr wrap="square" lIns="0" tIns="0" rIns="0" bIns="0" rtlCol="0" anchor="ctr"/>
           <a:lstStyle/>
           <a:p>
-            <a:pPr algn="ctr" indent="0" marL="0">
+            <a:pPr marL="0" indent="0" algn="ctr">
               <a:buNone/>
             </a:pPr>
             <a:r>
@@ -8374,7 +7962,7 @@
           <a:bodyPr wrap="square" lIns="0" tIns="0" rIns="0" bIns="0" rtlCol="0" anchor="ctr"/>
           <a:lstStyle/>
           <a:p>
-            <a:pPr indent="0" marL="0">
+            <a:pPr marL="0" indent="0">
               <a:buNone/>
             </a:pPr>
             <a:r>
@@ -8413,7 +8001,7 @@
           <a:bodyPr wrap="square" lIns="0" tIns="0" rIns="0" bIns="0" rtlCol="0" anchor="ctr"/>
           <a:lstStyle/>
           <a:p>
-            <a:pPr indent="0" marL="0">
+            <a:pPr marL="0" indent="0">
               <a:buNone/>
             </a:pPr>
             <a:r>
@@ -8452,7 +8040,7 @@
           <a:bodyPr wrap="square" lIns="0" tIns="0" rIns="0" bIns="0" rtlCol="0" anchor="ctr"/>
           <a:lstStyle/>
           <a:p>
-            <a:pPr indent="0" marL="0">
+            <a:pPr marL="0" indent="0">
               <a:buNone/>
             </a:pPr>
             <a:r>
@@ -8533,7 +8121,7 @@
           <a:bodyPr wrap="square" lIns="0" tIns="0" rIns="0" bIns="0" rtlCol="0" anchor="ctr"/>
           <a:lstStyle/>
           <a:p>
-            <a:pPr algn="ctr" indent="0" marL="0">
+            <a:pPr marL="0" indent="0" algn="ctr">
               <a:buNone/>
             </a:pPr>
             <a:r>
@@ -8572,7 +8160,7 @@
           <a:bodyPr wrap="square" lIns="0" tIns="0" rIns="0" bIns="0" rtlCol="0" anchor="ctr"/>
           <a:lstStyle/>
           <a:p>
-            <a:pPr indent="0" marL="0">
+            <a:pPr marL="0" indent="0">
               <a:buNone/>
             </a:pPr>
             <a:r>
@@ -8611,7 +8199,7 @@
           <a:bodyPr wrap="square" lIns="0" tIns="0" rIns="0" bIns="0" rtlCol="0" anchor="ctr"/>
           <a:lstStyle/>
           <a:p>
-            <a:pPr indent="0" marL="0">
+            <a:pPr marL="0" indent="0">
               <a:buNone/>
             </a:pPr>
             <a:r>
@@ -8650,7 +8238,7 @@
           <a:bodyPr wrap="square" lIns="0" tIns="0" rIns="0" bIns="0" rtlCol="0" anchor="ctr"/>
           <a:lstStyle/>
           <a:p>
-            <a:pPr indent="0" marL="0">
+            <a:pPr marL="0" indent="0">
               <a:buNone/>
             </a:pPr>
             <a:r>
@@ -8731,7 +8319,7 @@
           <a:bodyPr wrap="square" lIns="0" tIns="0" rIns="0" bIns="0" rtlCol="0" anchor="ctr"/>
           <a:lstStyle/>
           <a:p>
-            <a:pPr algn="ctr" indent="0" marL="0">
+            <a:pPr marL="0" indent="0" algn="ctr">
               <a:buNone/>
             </a:pPr>
             <a:r>
@@ -8770,7 +8358,7 @@
           <a:bodyPr wrap="square" lIns="0" tIns="0" rIns="0" bIns="0" rtlCol="0" anchor="ctr"/>
           <a:lstStyle/>
           <a:p>
-            <a:pPr indent="0" marL="0">
+            <a:pPr marL="0" indent="0">
               <a:buNone/>
             </a:pPr>
             <a:r>
@@ -8809,7 +8397,7 @@
           <a:bodyPr wrap="square" lIns="0" tIns="0" rIns="0" bIns="0" rtlCol="0" anchor="ctr"/>
           <a:lstStyle/>
           <a:p>
-            <a:pPr indent="0" marL="0">
+            <a:pPr marL="0" indent="0">
               <a:buNone/>
             </a:pPr>
             <a:r>
@@ -8848,7 +8436,7 @@
           <a:bodyPr wrap="square" lIns="0" tIns="0" rIns="0" bIns="0" rtlCol="0" anchor="ctr"/>
           <a:lstStyle/>
           <a:p>
-            <a:pPr indent="0" marL="0">
+            <a:pPr marL="0" indent="0">
               <a:buNone/>
             </a:pPr>
             <a:r>
@@ -8929,7 +8517,7 @@
           <a:bodyPr wrap="square" lIns="0" tIns="0" rIns="0" bIns="0" rtlCol="0" anchor="ctr"/>
           <a:lstStyle/>
           <a:p>
-            <a:pPr algn="ctr" indent="0" marL="0">
+            <a:pPr marL="0" indent="0" algn="ctr">
               <a:buNone/>
             </a:pPr>
             <a:r>
@@ -8968,7 +8556,7 @@
           <a:bodyPr wrap="square" lIns="0" tIns="0" rIns="0" bIns="0" rtlCol="0" anchor="ctr"/>
           <a:lstStyle/>
           <a:p>
-            <a:pPr indent="0" marL="0">
+            <a:pPr marL="0" indent="0">
               <a:buNone/>
             </a:pPr>
             <a:r>
@@ -9007,7 +8595,7 @@
           <a:bodyPr wrap="square" lIns="0" tIns="0" rIns="0" bIns="0" rtlCol="0" anchor="ctr"/>
           <a:lstStyle/>
           <a:p>
-            <a:pPr indent="0" marL="0">
+            <a:pPr marL="0" indent="0">
               <a:buNone/>
             </a:pPr>
             <a:r>
@@ -9046,7 +8634,7 @@
           <a:bodyPr wrap="square" lIns="0" tIns="0" rIns="0" bIns="0" rtlCol="0" anchor="ctr"/>
           <a:lstStyle/>
           <a:p>
-            <a:pPr indent="0" marL="0">
+            <a:pPr marL="0" indent="0">
               <a:buNone/>
             </a:pPr>
             <a:r>
@@ -9085,7 +8673,7 @@
           <a:bodyPr wrap="square" lIns="0" tIns="0" rIns="0" bIns="0" rtlCol="0" anchor="ctr"/>
           <a:lstStyle/>
           <a:p>
-            <a:pPr algn="ctr" indent="0" marL="0">
+            <a:pPr marL="0" indent="0" algn="ctr">
               <a:buNone/>
             </a:pPr>
             <a:r>
@@ -9119,6 +8707,7 @@
         <a:solidFill>
           <a:srgbClr val="1E1526"/>
         </a:solidFill>
+        <a:effectLst/>
       </p:bgPr>
     </p:bg>
     <p:spTree>
@@ -9156,11 +8745,11 @@
           <a:bodyPr wrap="square" lIns="0" tIns="0" rIns="0" bIns="0" rtlCol="0" anchor="ctr"/>
           <a:lstStyle/>
           <a:p>
-            <a:pPr indent="0" marL="0">
-              <a:buNone/>
-            </a:pPr>
-            <a:r>
-              <a:rPr lang="en-US" sz="1200" b="1" spc="200" kern="0" dirty="0">
+            <a:pPr marL="0" indent="0">
+              <a:buNone/>
+            </a:pPr>
+            <a:r>
+              <a:rPr lang="en-US" sz="1200" b="1" kern="0" spc="200" dirty="0">
                 <a:solidFill>
                   <a:srgbClr val="9B72D0"/>
                 </a:solidFill>
@@ -9195,7 +8784,7 @@
           <a:bodyPr wrap="square" lIns="0" tIns="0" rIns="0" bIns="0" rtlCol="0" anchor="ctr"/>
           <a:lstStyle/>
           <a:p>
-            <a:pPr algn="l" indent="0" marL="0">
+            <a:pPr marL="0" indent="0" algn="l">
               <a:buNone/>
             </a:pPr>
             <a:r>
@@ -9256,11 +8845,11 @@
           <a:bodyPr wrap="square" lIns="0" tIns="0" rIns="0" bIns="0" rtlCol="0" anchor="ctr"/>
           <a:lstStyle/>
           <a:p>
-            <a:pPr algn="ctr" indent="0" marL="0">
-              <a:buNone/>
-            </a:pPr>
-            <a:r>
-              <a:rPr lang="en-US" sz="1300" b="1" spc="100" kern="0" dirty="0">
+            <a:pPr marL="0" indent="0" algn="ctr">
+              <a:buNone/>
+            </a:pPr>
+            <a:r>
+              <a:rPr lang="en-US" sz="1300" b="1" kern="0" spc="100" dirty="0">
                 <a:solidFill>
                   <a:srgbClr val="FFFFFF"/>
                 </a:solidFill>
@@ -9295,7 +8884,7 @@
           <a:bodyPr wrap="square" lIns="0" tIns="0" rIns="0" bIns="0" rtlCol="0" anchor="ctr"/>
           <a:lstStyle/>
           <a:p>
-            <a:pPr algn="r" indent="0" marL="0">
+            <a:pPr marL="0" indent="0" algn="r">
               <a:buNone/>
             </a:pPr>
             <a:r>
@@ -9334,7 +8923,7 @@
           <a:bodyPr wrap="square" lIns="0" tIns="0" rIns="0" bIns="0" rtlCol="0" anchor="t"/>
           <a:lstStyle/>
           <a:p>
-            <a:pPr algn="l" marL="203200" indent="-203200">
+            <a:pPr marL="203200" indent="-203200" algn="l">
               <a:spcAft>
                 <a:spcPts val="1100"/>
               </a:spcAft>
@@ -9355,7 +8944,7 @@
             <a:endParaRPr lang="en-US" sz="1700" dirty="0"/>
           </a:p>
           <a:p>
-            <a:pPr algn="l" marL="203200" indent="-203200">
+            <a:pPr marL="203200" indent="-203200" algn="l">
               <a:spcAft>
                 <a:spcPts val="1100"/>
               </a:spcAft>
@@ -9376,7 +8965,7 @@
             <a:endParaRPr lang="en-US" sz="1700" dirty="0"/>
           </a:p>
           <a:p>
-            <a:pPr algn="l" marL="203200" indent="-203200">
+            <a:pPr marL="203200" indent="-203200" algn="l">
               <a:spcAft>
                 <a:spcPts val="1100"/>
               </a:spcAft>
@@ -9397,7 +8986,7 @@
             <a:endParaRPr lang="en-US" sz="1700" dirty="0"/>
           </a:p>
           <a:p>
-            <a:pPr algn="l" marL="203200" indent="-203200">
+            <a:pPr marL="203200" indent="-203200" algn="l">
               <a:spcAft>
                 <a:spcPts val="1100"/>
               </a:spcAft>
@@ -9462,7 +9051,7 @@
           <a:bodyPr wrap="square" lIns="0" tIns="0" rIns="0" bIns="0" rtlCol="0" anchor="ctr"/>
           <a:lstStyle/>
           <a:p>
-            <a:pPr algn="ctr" indent="0" marL="0">
+            <a:pPr marL="0" indent="0" algn="ctr">
               <a:buNone/>
             </a:pPr>
             <a:r>
@@ -9501,7 +9090,7 @@
           <a:bodyPr wrap="square" lIns="0" tIns="0" rIns="0" bIns="0" rtlCol="0" anchor="ctr"/>
           <a:lstStyle/>
           <a:p>
-            <a:pPr algn="ctr" indent="0" marL="0">
+            <a:pPr marL="0" indent="0" algn="ctr">
               <a:buNone/>
             </a:pPr>
             <a:r>
@@ -9559,7 +9148,7 @@
           <a:bodyPr wrap="square" lIns="0" tIns="0" rIns="0" bIns="0" rtlCol="0" anchor="ctr"/>
           <a:lstStyle/>
           <a:p>
-            <a:pPr algn="ctr" indent="0" marL="0">
+            <a:pPr marL="0" indent="0" algn="ctr">
               <a:buNone/>
             </a:pPr>
             <a:r>
@@ -9598,7 +9187,7 @@
           <a:bodyPr wrap="square" lIns="0" tIns="0" rIns="0" bIns="0" rtlCol="0" anchor="ctr"/>
           <a:lstStyle/>
           <a:p>
-            <a:pPr algn="ctr" indent="0" marL="0">
+            <a:pPr marL="0" indent="0" algn="ctr">
               <a:buNone/>
             </a:pPr>
             <a:r>
@@ -9656,7 +9245,7 @@
           <a:bodyPr wrap="square" lIns="0" tIns="0" rIns="0" bIns="0" rtlCol="0" anchor="ctr"/>
           <a:lstStyle/>
           <a:p>
-            <a:pPr algn="ctr" indent="0" marL="0">
+            <a:pPr marL="0" indent="0" algn="ctr">
               <a:buNone/>
             </a:pPr>
             <a:r>
@@ -9782,7 +9371,7 @@
           <a:bodyPr wrap="square" lIns="0" tIns="0" rIns="0" bIns="0" rtlCol="0" anchor="t"/>
           <a:lstStyle/>
           <a:p>
-            <a:pPr algn="l" indent="0" marL="0">
+            <a:pPr marL="0" indent="0" algn="l">
               <a:lnSpc>
                 <a:spcPct val="112000"/>
               </a:lnSpc>
@@ -9802,7 +9391,7 @@
             <a:endParaRPr lang="en-US" sz="1500" dirty="0"/>
           </a:p>
           <a:p>
-            <a:pPr algn="l" indent="0" marL="0">
+            <a:pPr marL="0" indent="0" algn="l">
               <a:lnSpc>
                 <a:spcPct val="112000"/>
               </a:lnSpc>
@@ -9822,7 +9411,7 @@
             <a:endParaRPr lang="en-US" sz="1500" dirty="0"/>
           </a:p>
           <a:p>
-            <a:pPr algn="l" indent="0" marL="0">
+            <a:pPr marL="0" indent="0" algn="l">
               <a:lnSpc>
                 <a:spcPct val="112000"/>
               </a:lnSpc>
@@ -9842,7 +9431,7 @@
             <a:endParaRPr lang="en-US" sz="1500" dirty="0"/>
           </a:p>
           <a:p>
-            <a:pPr algn="l" indent="0" marL="0">
+            <a:pPr marL="0" indent="0" algn="l">
               <a:lnSpc>
                 <a:spcPct val="112000"/>
               </a:lnSpc>
@@ -9862,7 +9451,7 @@
             <a:endParaRPr lang="en-US" sz="1500" dirty="0"/>
           </a:p>
           <a:p>
-            <a:pPr algn="l" indent="0" marL="0">
+            <a:pPr marL="0" indent="0" algn="l">
               <a:lnSpc>
                 <a:spcPct val="112000"/>
               </a:lnSpc>
@@ -9882,7 +9471,7 @@
             <a:endParaRPr lang="en-US" sz="1500" dirty="0"/>
           </a:p>
           <a:p>
-            <a:pPr algn="l" indent="0" marL="0">
+            <a:pPr marL="0" indent="0" algn="l">
               <a:lnSpc>
                 <a:spcPct val="112000"/>
               </a:lnSpc>
@@ -9902,7 +9491,7 @@
             <a:endParaRPr lang="en-US" sz="1500" dirty="0"/>
           </a:p>
           <a:p>
-            <a:pPr algn="l" indent="0" marL="0">
+            <a:pPr marL="0" indent="0" algn="l">
               <a:lnSpc>
                 <a:spcPct val="112000"/>
               </a:lnSpc>
@@ -9939,6 +9528,7 @@
         <a:solidFill>
           <a:srgbClr val="1E1526"/>
         </a:solidFill>
+        <a:effectLst/>
       </p:bgPr>
     </p:bg>
     <p:spTree>
@@ -9976,11 +9566,11 @@
           <a:bodyPr wrap="square" lIns="0" tIns="0" rIns="0" bIns="0" rtlCol="0" anchor="ctr"/>
           <a:lstStyle/>
           <a:p>
-            <a:pPr indent="0" marL="0">
-              <a:buNone/>
-            </a:pPr>
-            <a:r>
-              <a:rPr lang="en-US" sz="1200" b="1" spc="200" kern="0" dirty="0">
+            <a:pPr marL="0" indent="0">
+              <a:buNone/>
+            </a:pPr>
+            <a:r>
+              <a:rPr lang="en-US" sz="1200" b="1" kern="0" spc="200" dirty="0">
                 <a:solidFill>
                   <a:srgbClr val="9B72D0"/>
                 </a:solidFill>
@@ -10015,7 +9605,7 @@
           <a:bodyPr wrap="square" lIns="0" tIns="0" rIns="0" bIns="0" rtlCol="0" anchor="ctr"/>
           <a:lstStyle/>
           <a:p>
-            <a:pPr algn="l" indent="0" marL="0">
+            <a:pPr marL="0" indent="0" algn="l">
               <a:buNone/>
             </a:pPr>
             <a:r>
@@ -10076,11 +9666,11 @@
           <a:bodyPr wrap="square" lIns="0" tIns="0" rIns="0" bIns="0" rtlCol="0" anchor="ctr"/>
           <a:lstStyle/>
           <a:p>
-            <a:pPr algn="ctr" indent="0" marL="0">
-              <a:buNone/>
-            </a:pPr>
-            <a:r>
-              <a:rPr lang="en-US" sz="1300" b="1" spc="100" kern="0" dirty="0">
+            <a:pPr marL="0" indent="0" algn="ctr">
+              <a:buNone/>
+            </a:pPr>
+            <a:r>
+              <a:rPr lang="en-US" sz="1300" b="1" kern="0" spc="100" dirty="0">
                 <a:solidFill>
                   <a:srgbClr val="FFFFFF"/>
                 </a:solidFill>
@@ -10115,7 +9705,7 @@
           <a:bodyPr wrap="square" lIns="0" tIns="0" rIns="0" bIns="0" rtlCol="0" anchor="ctr"/>
           <a:lstStyle/>
           <a:p>
-            <a:pPr algn="r" indent="0" marL="0">
+            <a:pPr marL="0" indent="0" algn="r">
               <a:buNone/>
             </a:pPr>
             <a:r>
@@ -10154,7 +9744,7 @@
           <a:bodyPr wrap="square" lIns="0" tIns="0" rIns="0" bIns="0" rtlCol="0" anchor="ctr"/>
           <a:lstStyle/>
           <a:p>
-            <a:pPr indent="0" marL="0">
+            <a:pPr marL="0" indent="0">
               <a:buNone/>
             </a:pPr>
             <a:r>
@@ -10213,7 +9803,7 @@
           <a:bodyPr wrap="square" lIns="0" tIns="0" rIns="0" bIns="0" rtlCol="0" anchor="ctr"/>
           <a:lstStyle/>
           <a:p>
-            <a:pPr indent="0" marL="0">
+            <a:pPr marL="0" indent="0">
               <a:buNone/>
             </a:pPr>
             <a:r>
@@ -10227,9 +9817,6 @@
               </a:rPr>
               <a:t>validarCPF(cpf)   </a:t>
             </a:r>
-            <a:pPr indent="0" marL="0">
-              <a:buNone/>
-            </a:pPr>
             <a:r>
               <a:rPr lang="en-US" sz="1300" dirty="0">
                 <a:solidFill>
@@ -10286,7 +9873,7 @@
           <a:bodyPr wrap="square" lIns="0" tIns="0" rIns="0" bIns="0" rtlCol="0" anchor="ctr"/>
           <a:lstStyle/>
           <a:p>
-            <a:pPr indent="0" marL="0">
+            <a:pPr marL="0" indent="0">
               <a:buNone/>
             </a:pPr>
             <a:r>
@@ -10300,9 +9887,6 @@
               </a:rPr>
               <a:t>calcularFrete(cep, peso)   </a:t>
             </a:r>
-            <a:pPr indent="0" marL="0">
-              <a:buNone/>
-            </a:pPr>
             <a:r>
               <a:rPr lang="en-US" sz="1300" dirty="0">
                 <a:solidFill>
@@ -10359,7 +9943,7 @@
           <a:bodyPr wrap="square" lIns="0" tIns="0" rIns="0" bIns="0" rtlCol="0" anchor="ctr"/>
           <a:lstStyle/>
           <a:p>
-            <a:pPr indent="0" marL="0">
+            <a:pPr marL="0" indent="0">
               <a:buNone/>
             </a:pPr>
             <a:r>
@@ -10373,9 +9957,6 @@
               </a:rPr>
               <a:t>formatarMoeda(valor)   </a:t>
             </a:r>
-            <a:pPr indent="0" marL="0">
-              <a:buNone/>
-            </a:pPr>
             <a:r>
               <a:rPr lang="en-US" sz="1300" dirty="0">
                 <a:solidFill>
@@ -10432,7 +10013,7 @@
           <a:bodyPr wrap="square" lIns="0" tIns="0" rIns="0" bIns="0" rtlCol="0" anchor="ctr"/>
           <a:lstStyle/>
           <a:p>
-            <a:pPr indent="0" marL="0">
+            <a:pPr marL="0" indent="0">
               <a:buNone/>
             </a:pPr>
             <a:r>
@@ -10446,9 +10027,6 @@
               </a:rPr>
               <a:t>enviarEmail(dest, msg)   </a:t>
             </a:r>
-            <a:pPr indent="0" marL="0">
-              <a:buNone/>
-            </a:pPr>
             <a:r>
               <a:rPr lang="en-US" sz="1300" dirty="0">
                 <a:solidFill>
@@ -10572,7 +10150,7 @@
           <a:bodyPr wrap="square" lIns="0" tIns="0" rIns="0" bIns="0" rtlCol="0" anchor="t"/>
           <a:lstStyle/>
           <a:p>
-            <a:pPr algn="l" indent="0" marL="0">
+            <a:pPr marL="0" indent="0" algn="l">
               <a:lnSpc>
                 <a:spcPct val="112000"/>
               </a:lnSpc>
@@ -10592,7 +10170,7 @@
             <a:endParaRPr lang="en-US" sz="1300" dirty="0"/>
           </a:p>
           <a:p>
-            <a:pPr algn="l" indent="0" marL="0">
+            <a:pPr marL="0" indent="0" algn="l">
               <a:lnSpc>
                 <a:spcPct val="112000"/>
               </a:lnSpc>
@@ -10612,7 +10190,7 @@
             <a:endParaRPr lang="en-US" sz="1300" dirty="0"/>
           </a:p>
           <a:p>
-            <a:pPr algn="l" indent="0" marL="0">
+            <a:pPr marL="0" indent="0" algn="l">
               <a:lnSpc>
                 <a:spcPct val="112000"/>
               </a:lnSpc>
@@ -10681,7 +10259,7 @@
           <a:bodyPr wrap="square" lIns="0" tIns="0" rIns="0" bIns="0" rtlCol="0" anchor="ctr"/>
           <a:lstStyle/>
           <a:p>
-            <a:pPr algn="l" indent="0" marL="0">
+            <a:pPr marL="0" indent="0" algn="l">
               <a:buNone/>
             </a:pPr>
             <a:r>
@@ -10715,6 +10293,7 @@
         <a:solidFill>
           <a:srgbClr val="1E1526"/>
         </a:solidFill>
+        <a:effectLst/>
       </p:bgPr>
     </p:bg>
     <p:spTree>
@@ -10752,11 +10331,11 @@
           <a:bodyPr wrap="square" lIns="0" tIns="0" rIns="0" bIns="0" rtlCol="0" anchor="ctr"/>
           <a:lstStyle/>
           <a:p>
-            <a:pPr indent="0" marL="0">
-              <a:buNone/>
-            </a:pPr>
-            <a:r>
-              <a:rPr lang="en-US" sz="1200" b="1" spc="200" kern="0" dirty="0">
+            <a:pPr marL="0" indent="0">
+              <a:buNone/>
+            </a:pPr>
+            <a:r>
+              <a:rPr lang="en-US" sz="1200" b="1" kern="0" spc="200" dirty="0">
                 <a:solidFill>
                   <a:srgbClr val="9B72D0"/>
                 </a:solidFill>
@@ -10791,7 +10370,7 @@
           <a:bodyPr wrap="square" lIns="0" tIns="0" rIns="0" bIns="0" rtlCol="0" anchor="ctr"/>
           <a:lstStyle/>
           <a:p>
-            <a:pPr algn="l" indent="0" marL="0">
+            <a:pPr marL="0" indent="0" algn="l">
               <a:buNone/>
             </a:pPr>
             <a:r>
@@ -10830,7 +10409,7 @@
           <a:bodyPr wrap="square" lIns="0" tIns="0" rIns="0" bIns="0" rtlCol="0" anchor="ctr"/>
           <a:lstStyle/>
           <a:p>
-            <a:pPr algn="r" indent="0" marL="0">
+            <a:pPr marL="0" indent="0" algn="r">
               <a:buNone/>
             </a:pPr>
             <a:r>
@@ -10891,7 +10470,7 @@
           <a:bodyPr wrap="square" lIns="0" tIns="0" rIns="0" bIns="0" rtlCol="0" anchor="ctr"/>
           <a:lstStyle/>
           <a:p>
-            <a:pPr indent="0" marL="0">
+            <a:pPr marL="0" indent="0">
               <a:buNone/>
             </a:pPr>
             <a:r>
@@ -10930,7 +10509,7 @@
           <a:bodyPr wrap="square" lIns="0" tIns="0" rIns="0" bIns="0" rtlCol="0" anchor="ctr"/>
           <a:lstStyle/>
           <a:p>
-            <a:pPr indent="0" marL="0">
+            <a:pPr marL="0" indent="0">
               <a:buNone/>
             </a:pPr>
             <a:r>
@@ -10996,7 +10575,7 @@
           <a:bodyPr wrap="square" lIns="0" tIns="0" rIns="0" bIns="0" rtlCol="0" anchor="ctr"/>
           <a:lstStyle/>
           <a:p>
-            <a:pPr indent="0" marL="0">
+            <a:pPr marL="0" indent="0">
               <a:buNone/>
             </a:pPr>
             <a:r>
@@ -11057,7 +10636,7 @@
           <a:bodyPr wrap="square" lIns="0" tIns="0" rIns="0" bIns="0" rtlCol="0" anchor="ctr"/>
           <a:lstStyle/>
           <a:p>
-            <a:pPr indent="0" marL="0">
+            <a:pPr marL="0" indent="0">
               <a:buNone/>
             </a:pPr>
             <a:r>
@@ -11096,7 +10675,7 @@
           <a:bodyPr wrap="square" lIns="0" tIns="0" rIns="0" bIns="0" rtlCol="0" anchor="ctr"/>
           <a:lstStyle/>
           <a:p>
-            <a:pPr indent="0" marL="0">
+            <a:pPr marL="0" indent="0">
               <a:buNone/>
             </a:pPr>
             <a:r>
@@ -11162,7 +10741,7 @@
           <a:bodyPr wrap="square" lIns="0" tIns="0" rIns="0" bIns="0" rtlCol="0" anchor="ctr"/>
           <a:lstStyle/>
           <a:p>
-            <a:pPr indent="0" marL="0">
+            <a:pPr marL="0" indent="0">
               <a:buNone/>
             </a:pPr>
             <a:r>
@@ -11223,7 +10802,7 @@
           <a:bodyPr wrap="square" lIns="0" tIns="0" rIns="0" bIns="0" rtlCol="0" anchor="ctr"/>
           <a:lstStyle/>
           <a:p>
-            <a:pPr indent="0" marL="0">
+            <a:pPr marL="0" indent="0">
               <a:buNone/>
             </a:pPr>
             <a:r>
@@ -11262,7 +10841,7 @@
           <a:bodyPr wrap="square" lIns="0" tIns="0" rIns="0" bIns="0" rtlCol="0" anchor="ctr"/>
           <a:lstStyle/>
           <a:p>
-            <a:pPr indent="0" marL="0">
+            <a:pPr marL="0" indent="0">
               <a:buNone/>
             </a:pPr>
             <a:r>
@@ -11328,7 +10907,7 @@
           <a:bodyPr wrap="square" lIns="0" tIns="0" rIns="0" bIns="0" rtlCol="0" anchor="ctr"/>
           <a:lstStyle/>
           <a:p>
-            <a:pPr indent="0" marL="0">
+            <a:pPr marL="0" indent="0">
               <a:buNone/>
             </a:pPr>
             <a:r>
@@ -11394,7 +10973,7 @@
           <a:bodyPr wrap="square" lIns="0" tIns="0" rIns="0" bIns="0" rtlCol="0" anchor="ctr"/>
           <a:lstStyle/>
           <a:p>
-            <a:pPr algn="l" indent="0" marL="0">
+            <a:pPr marL="0" indent="0" algn="l">
               <a:buNone/>
             </a:pPr>
             <a:r>
@@ -11428,6 +11007,7 @@
         <a:solidFill>
           <a:srgbClr val="271C33"/>
         </a:solidFill>
+        <a:effectLst/>
       </p:bgPr>
     </p:bg>
     <p:spTree>
@@ -11505,11 +11085,11 @@
           <a:bodyPr wrap="square" lIns="0" tIns="0" rIns="0" bIns="0" rtlCol="0" anchor="ctr"/>
           <a:lstStyle/>
           <a:p>
-            <a:pPr indent="0" marL="0">
-              <a:buNone/>
-            </a:pPr>
-            <a:r>
-              <a:rPr lang="en-US" sz="1500" b="1" spc="300" kern="0" dirty="0">
+            <a:pPr marL="0" indent="0">
+              <a:buNone/>
+            </a:pPr>
+            <a:r>
+              <a:rPr lang="en-US" sz="1500" b="1" kern="0" spc="300" dirty="0">
                 <a:solidFill>
                   <a:srgbClr val="9B72D0"/>
                 </a:solidFill>
@@ -11544,7 +11124,7 @@
           <a:bodyPr wrap="square" lIns="0" tIns="0" rIns="0" bIns="0" rtlCol="0" anchor="ctr"/>
           <a:lstStyle/>
           <a:p>
-            <a:pPr indent="0" marL="0">
+            <a:pPr marL="0" indent="0">
               <a:buNone/>
             </a:pPr>
             <a:r>
@@ -11610,7 +11190,7 @@
           <a:bodyPr wrap="square" lIns="0" tIns="0" rIns="0" bIns="0" rtlCol="0" anchor="ctr"/>
           <a:lstStyle/>
           <a:p>
-            <a:pPr indent="0" marL="0">
+            <a:pPr marL="0" indent="0">
               <a:lnSpc>
                 <a:spcPct val="115000"/>
               </a:lnSpc>
@@ -11630,7 +11210,7 @@
             <a:endParaRPr lang="en-US" sz="1900" dirty="0"/>
           </a:p>
           <a:p>
-            <a:pPr indent="0" marL="0">
+            <a:pPr marL="0" indent="0">
               <a:lnSpc>
                 <a:spcPct val="115000"/>
               </a:lnSpc>
@@ -11639,7 +11219,7 @@
             <a:endParaRPr lang="en-US" sz="1900" dirty="0"/>
           </a:p>
           <a:p>
-            <a:pPr indent="0" marL="0">
+            <a:pPr marL="0" indent="0">
               <a:lnSpc>
                 <a:spcPct val="115000"/>
               </a:lnSpc>
@@ -11662,67 +11242,6 @@
       </p:sp>
       <p:sp>
         <p:nvSpPr>
-          <p:cNvPr id="8" name="Shape 6"/>
-          <p:cNvSpPr/>
-          <p:nvPr/>
-        </p:nvSpPr>
-        <p:spPr>
-          <a:xfrm>
-            <a:off x="731520" y="5212080"/>
-            <a:ext cx="2743200" cy="640080"/>
-          </a:xfrm>
-          <a:prstGeom prst="roundRect">
-            <a:avLst>
-              <a:gd name="adj" fmla="val 12857"/>
-            </a:avLst>
-          </a:prstGeom>
-          <a:solidFill>
-            <a:srgbClr val="6D4AA0"/>
-          </a:solidFill>
-          <a:ln/>
-        </p:spPr>
-      </p:sp>
-      <p:sp>
-        <p:nvSpPr>
-          <p:cNvPr id="9" name="Text 7"/>
-          <p:cNvSpPr/>
-          <p:nvPr/>
-        </p:nvSpPr>
-        <p:spPr>
-          <a:xfrm>
-            <a:off x="731520" y="5212080"/>
-            <a:ext cx="2743200" cy="640080"/>
-          </a:xfrm>
-          <a:prstGeom prst="rect">
-            <a:avLst/>
-          </a:prstGeom>
-          <a:noFill/>
-          <a:ln/>
-        </p:spPr>
-        <p:txBody>
-          <a:bodyPr wrap="square" lIns="0" tIns="0" rIns="0" bIns="0" rtlCol="0" anchor="ctr"/>
-          <a:lstStyle/>
-          <a:p>
-            <a:pPr algn="ctr" indent="0" marL="0">
-              <a:buNone/>
-            </a:pPr>
-            <a:r>
-              <a:rPr lang="en-US" sz="1600" b="1" dirty="0">
-                <a:solidFill>
-                  <a:srgbClr val="FFFFFF"/>
-                </a:solidFill>
-                <a:latin typeface="Calibri" pitchFamily="34" charset="0"/>
-                <a:ea typeface="Calibri" pitchFamily="34" charset="-122"/>
-                <a:cs typeface="Calibri" pitchFamily="34" charset="-120"/>
-              </a:rPr>
-              <a:t>≈ 8 min · em duplas</a:t>
-            </a:r>
-            <a:endParaRPr lang="en-US" sz="1600" dirty="0"/>
-          </a:p>
-        </p:txBody>
-      </p:sp>
-      <p:sp>
-        <p:nvSpPr>
           <p:cNvPr id="10" name="Text 8"/>
           <p:cNvSpPr/>
           <p:nvPr/>
@@ -11742,7 +11261,7 @@
           <a:bodyPr wrap="square" lIns="0" tIns="0" rIns="0" bIns="0" rtlCol="0" anchor="ctr"/>
           <a:lstStyle/>
           <a:p>
-            <a:pPr algn="r" indent="0" marL="0">
+            <a:pPr marL="0" indent="0" algn="r">
               <a:buNone/>
             </a:pPr>
             <a:r>
@@ -11776,6 +11295,7 @@
         <a:solidFill>
           <a:srgbClr val="1E1526"/>
         </a:solidFill>
+        <a:effectLst/>
       </p:bgPr>
     </p:bg>
     <p:spTree>
@@ -11813,11 +11333,11 @@
           <a:bodyPr wrap="square" lIns="0" tIns="0" rIns="0" bIns="0" rtlCol="0" anchor="ctr"/>
           <a:lstStyle/>
           <a:p>
-            <a:pPr indent="0" marL="0">
-              <a:buNone/>
-            </a:pPr>
-            <a:r>
-              <a:rPr lang="en-US" sz="1200" b="1" spc="200" kern="0" dirty="0">
+            <a:pPr marL="0" indent="0">
+              <a:buNone/>
+            </a:pPr>
+            <a:r>
+              <a:rPr lang="en-US" sz="1200" b="1" kern="0" spc="200" dirty="0">
                 <a:solidFill>
                   <a:srgbClr val="9B72D0"/>
                 </a:solidFill>
@@ -11852,7 +11372,7 @@
           <a:bodyPr wrap="square" lIns="0" tIns="0" rIns="0" bIns="0" rtlCol="0" anchor="ctr"/>
           <a:lstStyle/>
           <a:p>
-            <a:pPr algn="l" indent="0" marL="0">
+            <a:pPr marL="0" indent="0" algn="l">
               <a:buNone/>
             </a:pPr>
             <a:r>
@@ -11913,11 +11433,11 @@
           <a:bodyPr wrap="square" lIns="0" tIns="0" rIns="0" bIns="0" rtlCol="0" anchor="ctr"/>
           <a:lstStyle/>
           <a:p>
-            <a:pPr algn="ctr" indent="0" marL="0">
-              <a:buNone/>
-            </a:pPr>
-            <a:r>
-              <a:rPr lang="en-US" sz="1300" b="1" spc="100" kern="0" dirty="0">
+            <a:pPr marL="0" indent="0" algn="ctr">
+              <a:buNone/>
+            </a:pPr>
+            <a:r>
+              <a:rPr lang="en-US" sz="1300" b="1" kern="0" spc="100" dirty="0">
                 <a:solidFill>
                   <a:srgbClr val="FFFFFF"/>
                 </a:solidFill>
@@ -11952,7 +11472,7 @@
           <a:bodyPr wrap="square" lIns="0" tIns="0" rIns="0" bIns="0" rtlCol="0" anchor="ctr"/>
           <a:lstStyle/>
           <a:p>
-            <a:pPr algn="r" indent="0" marL="0">
+            <a:pPr marL="0" indent="0" algn="r">
               <a:buNone/>
             </a:pPr>
             <a:r>
@@ -11991,7 +11511,7 @@
           <a:bodyPr wrap="square" lIns="0" tIns="0" rIns="0" bIns="0" rtlCol="0" anchor="t"/>
           <a:lstStyle/>
           <a:p>
-            <a:pPr algn="l" marL="203200" indent="-203200">
+            <a:pPr marL="203200" indent="-203200" algn="l">
               <a:spcAft>
                 <a:spcPts val="1100"/>
               </a:spcAft>
@@ -12012,7 +11532,7 @@
             <a:endParaRPr lang="en-US" sz="1700" dirty="0"/>
           </a:p>
           <a:p>
-            <a:pPr algn="l" marL="203200" indent="-203200">
+            <a:pPr marL="203200" indent="-203200" algn="l">
               <a:spcAft>
                 <a:spcPts val="1100"/>
               </a:spcAft>
@@ -12033,7 +11553,7 @@
             <a:endParaRPr lang="en-US" sz="1700" dirty="0"/>
           </a:p>
           <a:p>
-            <a:pPr algn="l" marL="203200" indent="-203200">
+            <a:pPr marL="203200" indent="-203200" algn="l">
               <a:spcAft>
                 <a:spcPts val="1100"/>
               </a:spcAft>
@@ -12054,7 +11574,7 @@
             <a:endParaRPr lang="en-US" sz="1700" dirty="0"/>
           </a:p>
           <a:p>
-            <a:pPr algn="l" marL="203200" indent="-203200">
+            <a:pPr marL="203200" indent="-203200" algn="l">
               <a:spcAft>
                 <a:spcPts val="1100"/>
               </a:spcAft>
@@ -12124,7 +11644,7 @@
           <a:bodyPr wrap="square" lIns="0" tIns="0" rIns="0" bIns="0" rtlCol="0" anchor="ctr"/>
           <a:lstStyle/>
           <a:p>
-            <a:pPr algn="l" indent="0" marL="0">
+            <a:pPr marL="0" indent="0" algn="l">
               <a:buNone/>
             </a:pPr>
             <a:r>
@@ -12250,7 +11770,7 @@
           <a:bodyPr wrap="square" lIns="0" tIns="0" rIns="0" bIns="0" rtlCol="0" anchor="t"/>
           <a:lstStyle/>
           <a:p>
-            <a:pPr algn="l" indent="0" marL="0">
+            <a:pPr marL="0" indent="0" algn="l">
               <a:lnSpc>
                 <a:spcPct val="112000"/>
               </a:lnSpc>
@@ -12270,7 +11790,7 @@
             <a:endParaRPr lang="en-US" sz="1400" dirty="0"/>
           </a:p>
           <a:p>
-            <a:pPr algn="l" indent="0" marL="0">
+            <a:pPr marL="0" indent="0" algn="l">
               <a:lnSpc>
                 <a:spcPct val="112000"/>
               </a:lnSpc>
@@ -12290,7 +11810,7 @@
             <a:endParaRPr lang="en-US" sz="1400" dirty="0"/>
           </a:p>
           <a:p>
-            <a:pPr algn="l" indent="0" marL="0">
+            <a:pPr marL="0" indent="0" algn="l">
               <a:lnSpc>
                 <a:spcPct val="112000"/>
               </a:lnSpc>
@@ -12310,7 +11830,7 @@
             <a:endParaRPr lang="en-US" sz="1400" dirty="0"/>
           </a:p>
           <a:p>
-            <a:pPr algn="l" indent="0" marL="0">
+            <a:pPr marL="0" indent="0" algn="l">
               <a:lnSpc>
                 <a:spcPct val="112000"/>
               </a:lnSpc>
@@ -12330,7 +11850,7 @@
             <a:endParaRPr lang="en-US" sz="1400" dirty="0"/>
           </a:p>
           <a:p>
-            <a:pPr algn="l" indent="0" marL="0">
+            <a:pPr marL="0" indent="0" algn="l">
               <a:lnSpc>
                 <a:spcPct val="112000"/>
               </a:lnSpc>
@@ -12350,7 +11870,7 @@
             <a:endParaRPr lang="en-US" sz="1400" dirty="0"/>
           </a:p>
           <a:p>
-            <a:pPr algn="l" indent="0" marL="0">
+            <a:pPr marL="0" indent="0" algn="l">
               <a:lnSpc>
                 <a:spcPct val="112000"/>
               </a:lnSpc>
@@ -12370,7 +11890,7 @@
             <a:endParaRPr lang="en-US" sz="1400" dirty="0"/>
           </a:p>
           <a:p>
-            <a:pPr algn="l" indent="0" marL="0">
+            <a:pPr marL="0" indent="0" algn="l">
               <a:lnSpc>
                 <a:spcPct val="112000"/>
               </a:lnSpc>
@@ -12407,6 +11927,7 @@
         <a:solidFill>
           <a:srgbClr val="1E1526"/>
         </a:solidFill>
+        <a:effectLst/>
       </p:bgPr>
     </p:bg>
     <p:spTree>
@@ -12444,11 +11965,11 @@
           <a:bodyPr wrap="square" lIns="0" tIns="0" rIns="0" bIns="0" rtlCol="0" anchor="ctr"/>
           <a:lstStyle/>
           <a:p>
-            <a:pPr indent="0" marL="0">
-              <a:buNone/>
-            </a:pPr>
-            <a:r>
-              <a:rPr lang="en-US" sz="1200" b="1" spc="200" kern="0" dirty="0">
+            <a:pPr marL="0" indent="0">
+              <a:buNone/>
+            </a:pPr>
+            <a:r>
+              <a:rPr lang="en-US" sz="1200" b="1" kern="0" spc="200" dirty="0">
                 <a:solidFill>
                   <a:srgbClr val="9B72D0"/>
                 </a:solidFill>
@@ -12483,7 +12004,7 @@
           <a:bodyPr wrap="square" lIns="0" tIns="0" rIns="0" bIns="0" rtlCol="0" anchor="ctr"/>
           <a:lstStyle/>
           <a:p>
-            <a:pPr algn="l" indent="0" marL="0">
+            <a:pPr marL="0" indent="0" algn="l">
               <a:buNone/>
             </a:pPr>
             <a:r>
@@ -12544,11 +12065,11 @@
           <a:bodyPr wrap="square" lIns="0" tIns="0" rIns="0" bIns="0" rtlCol="0" anchor="ctr"/>
           <a:lstStyle/>
           <a:p>
-            <a:pPr algn="ctr" indent="0" marL="0">
-              <a:buNone/>
-            </a:pPr>
-            <a:r>
-              <a:rPr lang="en-US" sz="1300" b="1" spc="100" kern="0" dirty="0">
+            <a:pPr marL="0" indent="0" algn="ctr">
+              <a:buNone/>
+            </a:pPr>
+            <a:r>
+              <a:rPr lang="en-US" sz="1300" b="1" kern="0" spc="100" dirty="0">
                 <a:solidFill>
                   <a:srgbClr val="FFFFFF"/>
                 </a:solidFill>
@@ -12583,7 +12104,7 @@
           <a:bodyPr wrap="square" lIns="0" tIns="0" rIns="0" bIns="0" rtlCol="0" anchor="ctr"/>
           <a:lstStyle/>
           <a:p>
-            <a:pPr algn="r" indent="0" marL="0">
+            <a:pPr marL="0" indent="0" algn="r">
               <a:buNone/>
             </a:pPr>
             <a:r>
@@ -12644,7 +12165,7 @@
           <a:bodyPr wrap="square" lIns="0" tIns="0" rIns="0" bIns="0" rtlCol="0" anchor="ctr"/>
           <a:lstStyle/>
           <a:p>
-            <a:pPr indent="0" marL="0">
+            <a:pPr marL="0" indent="0">
               <a:buNone/>
             </a:pPr>
             <a:r>
@@ -12683,7 +12204,7 @@
           <a:bodyPr wrap="square" lIns="0" tIns="0" rIns="0" bIns="0" rtlCol="0" anchor="t"/>
           <a:lstStyle/>
           <a:p>
-            <a:pPr indent="0" marL="0">
+            <a:pPr marL="0" indent="0">
               <a:buNone/>
             </a:pPr>
             <a:r>
@@ -12744,7 +12265,7 @@
           <a:bodyPr wrap="square" lIns="0" tIns="0" rIns="0" bIns="0" rtlCol="0" anchor="ctr"/>
           <a:lstStyle/>
           <a:p>
-            <a:pPr indent="0" marL="0">
+            <a:pPr marL="0" indent="0">
               <a:buNone/>
             </a:pPr>
             <a:r>
@@ -12783,7 +12304,7 @@
           <a:bodyPr wrap="square" lIns="0" tIns="0" rIns="0" bIns="0" rtlCol="0" anchor="t"/>
           <a:lstStyle/>
           <a:p>
-            <a:pPr indent="0" marL="0">
+            <a:pPr marL="0" indent="0">
               <a:buNone/>
             </a:pPr>
             <a:r>
@@ -12844,7 +12365,7 @@
           <a:bodyPr wrap="square" lIns="0" tIns="0" rIns="0" bIns="0" rtlCol="0" anchor="ctr"/>
           <a:lstStyle/>
           <a:p>
-            <a:pPr indent="0" marL="0">
+            <a:pPr marL="0" indent="0">
               <a:buNone/>
             </a:pPr>
             <a:r>
@@ -12883,7 +12404,7 @@
           <a:bodyPr wrap="square" lIns="0" tIns="0" rIns="0" bIns="0" rtlCol="0" anchor="t"/>
           <a:lstStyle/>
           <a:p>
-            <a:pPr indent="0" marL="0">
+            <a:pPr marL="0" indent="0">
               <a:buNone/>
             </a:pPr>
             <a:r>
@@ -12944,7 +12465,7 @@
           <a:bodyPr wrap="square" lIns="0" tIns="0" rIns="0" bIns="0" rtlCol="0" anchor="ctr"/>
           <a:lstStyle/>
           <a:p>
-            <a:pPr indent="0" marL="0">
+            <a:pPr marL="0" indent="0">
               <a:buNone/>
             </a:pPr>
             <a:r>
@@ -12983,7 +12504,7 @@
           <a:bodyPr wrap="square" lIns="0" tIns="0" rIns="0" bIns="0" rtlCol="0" anchor="t"/>
           <a:lstStyle/>
           <a:p>
-            <a:pPr indent="0" marL="0">
+            <a:pPr marL="0" indent="0">
               <a:buNone/>
             </a:pPr>
             <a:r>
@@ -13049,7 +12570,7 @@
           <a:bodyPr wrap="square" lIns="0" tIns="0" rIns="0" bIns="0" rtlCol="0" anchor="ctr"/>
           <a:lstStyle/>
           <a:p>
-            <a:pPr algn="l" indent="0" marL="0">
+            <a:pPr marL="0" indent="0" algn="l">
               <a:buNone/>
             </a:pPr>
             <a:r>
@@ -13368,4 +12889,299 @@
     </a:ext>
   </a:extLst>
 </a:theme>
+</file>
+
+<file path=ppt/theme/theme2.xml><?xml version="1.0" encoding="utf-8"?>
+<a:theme xmlns:a="http://schemas.openxmlformats.org/drawingml/2006/main" name="Tema do Office">
+  <a:themeElements>
+    <a:clrScheme name="Office">
+      <a:dk1>
+        <a:sysClr val="windowText" lastClr="000000"/>
+      </a:dk1>
+      <a:lt1>
+        <a:sysClr val="window" lastClr="FFFFFF"/>
+      </a:lt1>
+      <a:dk2>
+        <a:srgbClr val="44546A"/>
+      </a:dk2>
+      <a:lt2>
+        <a:srgbClr val="E7E6E6"/>
+      </a:lt2>
+      <a:accent1>
+        <a:srgbClr val="4472C4"/>
+      </a:accent1>
+      <a:accent2>
+        <a:srgbClr val="ED7D31"/>
+      </a:accent2>
+      <a:accent3>
+        <a:srgbClr val="A5A5A5"/>
+      </a:accent3>
+      <a:accent4>
+        <a:srgbClr val="FFC000"/>
+      </a:accent4>
+      <a:accent5>
+        <a:srgbClr val="5B9BD5"/>
+      </a:accent5>
+      <a:accent6>
+        <a:srgbClr val="70AD47"/>
+      </a:accent6>
+      <a:hlink>
+        <a:srgbClr val="0563C1"/>
+      </a:hlink>
+      <a:folHlink>
+        <a:srgbClr val="954F72"/>
+      </a:folHlink>
+    </a:clrScheme>
+    <a:fontScheme name="Office">
+      <a:majorFont>
+        <a:latin typeface="Calibri Light" panose="020F0302020204030204"/>
+        <a:ea typeface=""/>
+        <a:cs typeface=""/>
+        <a:font script="Jpan" typeface="游ゴシック Light"/>
+        <a:font script="Hang" typeface="맑은 고딕"/>
+        <a:font script="Hans" typeface="等线 Light"/>
+        <a:font script="Hant" typeface="新細明體"/>
+        <a:font script="Arab" typeface="Times New Roman"/>
+        <a:font script="Hebr" typeface="Times New Roman"/>
+        <a:font script="Thai" typeface="Angsana New"/>
+        <a:font script="Ethi" typeface="Nyala"/>
+        <a:font script="Beng" typeface="Vrinda"/>
+        <a:font script="Gujr" typeface="Shruti"/>
+        <a:font script="Khmr" typeface="MoolBoran"/>
+        <a:font script="Knda" typeface="Tunga"/>
+        <a:font script="Guru" typeface="Raavi"/>
+        <a:font script="Cans" typeface="Euphemia"/>
+        <a:font script="Cher" typeface="Plantagenet Cherokee"/>
+        <a:font script="Yiii" typeface="Microsoft Yi Baiti"/>
+        <a:font script="Tibt" typeface="Microsoft Himalaya"/>
+        <a:font script="Thaa" typeface="MV Boli"/>
+        <a:font script="Deva" typeface="Mangal"/>
+        <a:font script="Telu" typeface="Gautami"/>
+        <a:font script="Taml" typeface="Latha"/>
+        <a:font script="Syrc" typeface="Estrangelo Edessa"/>
+        <a:font script="Orya" typeface="Kalinga"/>
+        <a:font script="Mlym" typeface="Kartika"/>
+        <a:font script="Laoo" typeface="DokChampa"/>
+        <a:font script="Sinh" typeface="Iskoola Pota"/>
+        <a:font script="Mong" typeface="Mongolian Baiti"/>
+        <a:font script="Viet" typeface="Times New Roman"/>
+        <a:font script="Uigh" typeface="Microsoft Uighur"/>
+        <a:font script="Geor" typeface="Sylfaen"/>
+        <a:font script="Armn" typeface="Arial"/>
+        <a:font script="Bugi" typeface="Leelawadee UI"/>
+        <a:font script="Bopo" typeface="Microsoft JhengHei"/>
+        <a:font script="Java" typeface="Javanese Text"/>
+        <a:font script="Lisu" typeface="Segoe UI"/>
+        <a:font script="Mymr" typeface="Myanmar Text"/>
+        <a:font script="Nkoo" typeface="Ebrima"/>
+        <a:font script="Olck" typeface="Nirmala UI"/>
+        <a:font script="Osma" typeface="Ebrima"/>
+        <a:font script="Phag" typeface="Phagspa"/>
+        <a:font script="Syrn" typeface="Estrangelo Edessa"/>
+        <a:font script="Syrj" typeface="Estrangelo Edessa"/>
+        <a:font script="Syre" typeface="Estrangelo Edessa"/>
+        <a:font script="Sora" typeface="Nirmala UI"/>
+        <a:font script="Tale" typeface="Microsoft Tai Le"/>
+        <a:font script="Talu" typeface="Microsoft New Tai Lue"/>
+        <a:font script="Tfng" typeface="Ebrima"/>
+      </a:majorFont>
+      <a:minorFont>
+        <a:latin typeface="Calibri" panose="020F0502020204030204"/>
+        <a:ea typeface=""/>
+        <a:cs typeface=""/>
+        <a:font script="Jpan" typeface="游ゴシック"/>
+        <a:font script="Hang" typeface="맑은 고딕"/>
+        <a:font script="Hans" typeface="等线"/>
+        <a:font script="Hant" typeface="新細明體"/>
+        <a:font script="Arab" typeface="Arial"/>
+        <a:font script="Hebr" typeface="Arial"/>
+        <a:font script="Thai" typeface="Cordia New"/>
+        <a:font script="Ethi" typeface="Nyala"/>
+        <a:font script="Beng" typeface="Vrinda"/>
+        <a:font script="Gujr" typeface="Shruti"/>
+        <a:font script="Khmr" typeface="DaunPenh"/>
+        <a:font script="Knda" typeface="Tunga"/>
+        <a:font script="Guru" typeface="Raavi"/>
+        <a:font script="Cans" typeface="Euphemia"/>
+        <a:font script="Cher" typeface="Plantagenet Cherokee"/>
+        <a:font script="Yiii" typeface="Microsoft Yi Baiti"/>
+        <a:font script="Tibt" typeface="Microsoft Himalaya"/>
+        <a:font script="Thaa" typeface="MV Boli"/>
+        <a:font script="Deva" typeface="Mangal"/>
+        <a:font script="Telu" typeface="Gautami"/>
+        <a:font script="Taml" typeface="Latha"/>
+        <a:font script="Syrc" typeface="Estrangelo Edessa"/>
+        <a:font script="Orya" typeface="Kalinga"/>
+        <a:font script="Mlym" typeface="Kartika"/>
+        <a:font script="Laoo" typeface="DokChampa"/>
+        <a:font script="Sinh" typeface="Iskoola Pota"/>
+        <a:font script="Mong" typeface="Mongolian Baiti"/>
+        <a:font script="Viet" typeface="Arial"/>
+        <a:font script="Uigh" typeface="Microsoft Uighur"/>
+        <a:font script="Geor" typeface="Sylfaen"/>
+        <a:font script="Armn" typeface="Arial"/>
+        <a:font script="Bugi" typeface="Leelawadee UI"/>
+        <a:font script="Bopo" typeface="Microsoft JhengHei"/>
+        <a:font script="Java" typeface="Javanese Text"/>
+        <a:font script="Lisu" typeface="Segoe UI"/>
+        <a:font script="Mymr" typeface="Myanmar Text"/>
+        <a:font script="Nkoo" typeface="Ebrima"/>
+        <a:font script="Olck" typeface="Nirmala UI"/>
+        <a:font script="Osma" typeface="Ebrima"/>
+        <a:font script="Phag" typeface="Phagspa"/>
+        <a:font script="Syrn" typeface="Estrangelo Edessa"/>
+        <a:font script="Syrj" typeface="Estrangelo Edessa"/>
+        <a:font script="Syre" typeface="Estrangelo Edessa"/>
+        <a:font script="Sora" typeface="Nirmala UI"/>
+        <a:font script="Tale" typeface="Microsoft Tai Le"/>
+        <a:font script="Talu" typeface="Microsoft New Tai Lue"/>
+        <a:font script="Tfng" typeface="Ebrima"/>
+      </a:minorFont>
+    </a:fontScheme>
+    <a:fmtScheme name="Office">
+      <a:fillStyleLst>
+        <a:solidFill>
+          <a:schemeClr val="phClr"/>
+        </a:solidFill>
+        <a:gradFill rotWithShape="1">
+          <a:gsLst>
+            <a:gs pos="0">
+              <a:schemeClr val="phClr">
+                <a:lumMod val="110000"/>
+                <a:satMod val="105000"/>
+                <a:tint val="67000"/>
+              </a:schemeClr>
+            </a:gs>
+            <a:gs pos="50000">
+              <a:schemeClr val="phClr">
+                <a:lumMod val="105000"/>
+                <a:satMod val="103000"/>
+                <a:tint val="73000"/>
+              </a:schemeClr>
+            </a:gs>
+            <a:gs pos="100000">
+              <a:schemeClr val="phClr">
+                <a:lumMod val="105000"/>
+                <a:satMod val="109000"/>
+                <a:tint val="81000"/>
+              </a:schemeClr>
+            </a:gs>
+          </a:gsLst>
+          <a:lin ang="5400000" scaled="0"/>
+        </a:gradFill>
+        <a:gradFill rotWithShape="1">
+          <a:gsLst>
+            <a:gs pos="0">
+              <a:schemeClr val="phClr">
+                <a:satMod val="103000"/>
+                <a:lumMod val="102000"/>
+                <a:tint val="94000"/>
+              </a:schemeClr>
+            </a:gs>
+            <a:gs pos="50000">
+              <a:schemeClr val="phClr">
+                <a:satMod val="110000"/>
+                <a:lumMod val="100000"/>
+                <a:shade val="100000"/>
+              </a:schemeClr>
+            </a:gs>
+            <a:gs pos="100000">
+              <a:schemeClr val="phClr">
+                <a:lumMod val="99000"/>
+                <a:satMod val="120000"/>
+                <a:shade val="78000"/>
+              </a:schemeClr>
+            </a:gs>
+          </a:gsLst>
+          <a:lin ang="5400000" scaled="0"/>
+        </a:gradFill>
+      </a:fillStyleLst>
+      <a:lnStyleLst>
+        <a:ln w="6350" cap="flat" cmpd="sng" algn="ctr">
+          <a:solidFill>
+            <a:schemeClr val="phClr"/>
+          </a:solidFill>
+          <a:prstDash val="solid"/>
+          <a:miter lim="800000"/>
+        </a:ln>
+        <a:ln w="12700" cap="flat" cmpd="sng" algn="ctr">
+          <a:solidFill>
+            <a:schemeClr val="phClr"/>
+          </a:solidFill>
+          <a:prstDash val="solid"/>
+          <a:miter lim="800000"/>
+        </a:ln>
+        <a:ln w="19050" cap="flat" cmpd="sng" algn="ctr">
+          <a:solidFill>
+            <a:schemeClr val="phClr"/>
+          </a:solidFill>
+          <a:prstDash val="solid"/>
+          <a:miter lim="800000"/>
+        </a:ln>
+      </a:lnStyleLst>
+      <a:effectStyleLst>
+        <a:effectStyle>
+          <a:effectLst/>
+        </a:effectStyle>
+        <a:effectStyle>
+          <a:effectLst/>
+        </a:effectStyle>
+        <a:effectStyle>
+          <a:effectLst>
+            <a:outerShdw blurRad="57150" dist="19050" dir="5400000" algn="ctr" rotWithShape="0">
+              <a:srgbClr val="000000">
+                <a:alpha val="63000"/>
+              </a:srgbClr>
+            </a:outerShdw>
+          </a:effectLst>
+        </a:effectStyle>
+      </a:effectStyleLst>
+      <a:bgFillStyleLst>
+        <a:solidFill>
+          <a:schemeClr val="phClr"/>
+        </a:solidFill>
+        <a:solidFill>
+          <a:schemeClr val="phClr">
+            <a:tint val="95000"/>
+            <a:satMod val="170000"/>
+          </a:schemeClr>
+        </a:solidFill>
+        <a:gradFill rotWithShape="1">
+          <a:gsLst>
+            <a:gs pos="0">
+              <a:schemeClr val="phClr">
+                <a:tint val="93000"/>
+                <a:satMod val="150000"/>
+                <a:shade val="98000"/>
+                <a:lumMod val="102000"/>
+              </a:schemeClr>
+            </a:gs>
+            <a:gs pos="50000">
+              <a:schemeClr val="phClr">
+                <a:tint val="98000"/>
+                <a:satMod val="130000"/>
+                <a:shade val="90000"/>
+                <a:lumMod val="103000"/>
+              </a:schemeClr>
+            </a:gs>
+            <a:gs pos="100000">
+              <a:schemeClr val="phClr">
+                <a:shade val="63000"/>
+                <a:satMod val="120000"/>
+              </a:schemeClr>
+            </a:gs>
+          </a:gsLst>
+          <a:lin ang="5400000" scaled="0"/>
+        </a:gradFill>
+      </a:bgFillStyleLst>
+    </a:fmtScheme>
+  </a:themeElements>
+  <a:objectDefaults/>
+  <a:extraClrSchemeLst/>
+  <a:extLst>
+    <a:ext uri="{05A4C25C-085E-4340-85A3-A5531E510DB2}">
+      <thm15:themeFamily xmlns:thm15="http://schemas.microsoft.com/office/thememl/2012/main" name="Office Theme" id="{62F939B6-93AF-4DB8-9C6B-D6C7DFDC589F}" vid="{4A3C46E8-61CC-4603-A589-7422A47A8E4A}"/>
+    </a:ext>
+  </a:extLst>
+</a:theme>
 </file>